--- a/Учет займов в коммерческом банке.pptx
+++ b/Учет займов в коммерческом банке.pptx
@@ -5,40 +5,18 @@
     <p:sldMasterId id="2147483648" r:id="rId1"/>
   </p:sldMasterIdLst>
   <p:notesMasterIdLst>
-    <p:notesMasterId r:id="rId4"/>
+    <p:notesMasterId r:id="rId8"/>
   </p:notesMasterIdLst>
   <p:sldIdLst>
-    <p:sldId id="256" r:id="rId3"/>
-    <p:sldId id="257" r:id="rId5"/>
-    <p:sldId id="258" r:id="rId6"/>
-    <p:sldId id="259" r:id="rId7"/>
-    <p:sldId id="260" r:id="rId8"/>
-    <p:sldId id="261" r:id="rId9"/>
+    <p:sldId id="256" r:id="rId2"/>
+    <p:sldId id="257" r:id="rId3"/>
+    <p:sldId id="258" r:id="rId4"/>
+    <p:sldId id="259" r:id="rId5"/>
+    <p:sldId id="260" r:id="rId6"/>
+    <p:sldId id="261" r:id="rId7"/>
   </p:sldIdLst>
   <p:sldSz cx="12192000" cy="6858000"/>
   <p:notesSz cx="6858000" cy="9144000"/>
-  <p:embeddedFontLst>
-    <p:embeddedFont>
-      <p:font typeface="Calibri" panose="020F0502020204030204"/>
-      <p:regular r:id="rId13"/>
-      <p:bold r:id="rId14"/>
-      <p:italic r:id="rId15"/>
-      <p:boldItalic r:id="rId16"/>
-    </p:embeddedFont>
-    <p:embeddedFont>
-      <p:font typeface="Montserrat"/>
-      <p:regular r:id="rId17"/>
-      <p:bold r:id="rId18"/>
-      <p:boldItalic r:id="rId19"/>
-    </p:embeddedFont>
-    <p:embeddedFont>
-      <p:font typeface="Open Sans"/>
-      <p:regular r:id="rId20"/>
-      <p:bold r:id="rId21"/>
-      <p:italic r:id="rId22"/>
-      <p:boldItalic r:id="rId23"/>
-    </p:embeddedFont>
-  </p:embeddedFontLst>
   <p:defaultTextStyle>
     <a:defPPr marR="0" lvl="0" algn="l" rtl="0">
       <a:lnSpc>
@@ -297,7 +275,7 @@
     </p:bg>
     <p:spTree>
       <p:nvGrpSpPr>
-        <p:cNvPr id="2" name="Shape 2"/>
+        <p:cNvPr id="1" name="Shape 2"/>
         <p:cNvGrpSpPr/>
         <p:nvPr/>
       </p:nvGrpSpPr>
@@ -312,7 +290,9 @@
       <p:sp>
         <p:nvSpPr>
           <p:cNvPr id="3" name="Google Shape;3;n"/>
-          <p:cNvSpPr/>
+          <p:cNvSpPr>
+            <a:spLocks noGrp="1" noRot="1" noChangeAspect="1"/>
+          </p:cNvSpPr>
           <p:nvPr>
             <p:ph type="sldImg" idx="2"/>
           </p:nvPr>
@@ -361,7 +341,9 @@
       <p:sp>
         <p:nvSpPr>
           <p:cNvPr id="4" name="Google Shape;4;n"/>
-          <p:cNvSpPr txBox="1"/>
+          <p:cNvSpPr txBox="1">
+            <a:spLocks noGrp="1"/>
+          </p:cNvSpPr>
           <p:nvPr>
             <p:ph type="body" idx="1"/>
           </p:nvPr>
@@ -484,7 +466,9 @@
               <a:defRPr sz="1100"/>
             </a:lvl9pPr>
           </a:lstStyle>
-          <a:p/>
+          <a:p>
+            <a:endParaRPr/>
+          </a:p>
         </p:txBody>
       </p:sp>
     </p:spTree>
@@ -723,11 +707,11 @@
 </file>
 
 <file path=ppt/notesSlides/notesSlide1.xml><?xml version="1.0" encoding="utf-8"?>
-<p:notes xmlns:a="http://schemas.openxmlformats.org/drawingml/2006/main" xmlns:r="http://schemas.openxmlformats.org/officeDocument/2006/relationships" xmlns:p="http://schemas.openxmlformats.org/presentationml/2006/main" showMasterPhAnim="0" showMasterSp="0">
+<p:notes xmlns:a="http://schemas.openxmlformats.org/drawingml/2006/main" xmlns:r="http://schemas.openxmlformats.org/officeDocument/2006/relationships" xmlns:p="http://schemas.openxmlformats.org/presentationml/2006/main" showMasterSp="0" showMasterPhAnim="0">
   <p:cSld>
     <p:spTree>
       <p:nvGrpSpPr>
-        <p:cNvPr id="80" name="Shape 80"/>
+        <p:cNvPr id="1" name="Shape 80"/>
         <p:cNvGrpSpPr/>
         <p:nvPr/>
       </p:nvGrpSpPr>
@@ -742,7 +726,9 @@
       <p:sp>
         <p:nvSpPr>
           <p:cNvPr id="81" name="Google Shape;81;p1:notes"/>
-          <p:cNvSpPr txBox="1"/>
+          <p:cNvSpPr txBox="1">
+            <a:spLocks noGrp="1"/>
+          </p:cNvSpPr>
           <p:nvPr>
             <p:ph type="body" idx="1"/>
           </p:nvPr>
@@ -771,21 +757,24 @@
               </a:spcAft>
               <a:buNone/>
             </a:pPr>
+            <a:endParaRPr/>
           </a:p>
         </p:txBody>
       </p:sp>
       <p:sp>
         <p:nvSpPr>
           <p:cNvPr id="82" name="Google Shape;82;p1:notes"/>
-          <p:cNvSpPr/>
+          <p:cNvSpPr>
+            <a:spLocks noGrp="1" noRot="1" noChangeAspect="1"/>
+          </p:cNvSpPr>
           <p:nvPr>
             <p:ph type="sldImg" idx="2"/>
           </p:nvPr>
         </p:nvSpPr>
         <p:spPr>
           <a:xfrm>
-            <a:off x="1143225" y="685800"/>
-            <a:ext cx="4572225" cy="3429000"/>
+            <a:off x="381000" y="685800"/>
+            <a:ext cx="6096000" cy="3429000"/>
           </a:xfrm>
           <a:custGeom>
             <a:avLst/>
@@ -822,11 +811,11 @@
 </file>
 
 <file path=ppt/notesSlides/notesSlide2.xml><?xml version="1.0" encoding="utf-8"?>
-<p:notes xmlns:a="http://schemas.openxmlformats.org/drawingml/2006/main" xmlns:r="http://schemas.openxmlformats.org/officeDocument/2006/relationships" xmlns:p="http://schemas.openxmlformats.org/presentationml/2006/main" showMasterPhAnim="0" showMasterSp="0">
+<p:notes xmlns:a="http://schemas.openxmlformats.org/drawingml/2006/main" xmlns:r="http://schemas.openxmlformats.org/officeDocument/2006/relationships" xmlns:p="http://schemas.openxmlformats.org/presentationml/2006/main" showMasterSp="0" showMasterPhAnim="0">
   <p:cSld>
     <p:spTree>
       <p:nvGrpSpPr>
-        <p:cNvPr id="88" name="Shape 88"/>
+        <p:cNvPr id="1" name="Shape 88"/>
         <p:cNvGrpSpPr/>
         <p:nvPr/>
       </p:nvGrpSpPr>
@@ -841,7 +830,9 @@
       <p:sp>
         <p:nvSpPr>
           <p:cNvPr id="89" name="Google Shape;89;p2:notes"/>
-          <p:cNvSpPr txBox="1"/>
+          <p:cNvSpPr txBox="1">
+            <a:spLocks noGrp="1"/>
+          </p:cNvSpPr>
           <p:nvPr>
             <p:ph type="body" idx="1"/>
           </p:nvPr>
@@ -870,13 +861,16 @@
               </a:spcAft>
               <a:buNone/>
             </a:pPr>
+            <a:endParaRPr/>
           </a:p>
         </p:txBody>
       </p:sp>
       <p:sp>
         <p:nvSpPr>
           <p:cNvPr id="90" name="Google Shape;90;p2:notes"/>
-          <p:cNvSpPr/>
+          <p:cNvSpPr>
+            <a:spLocks noGrp="1" noRot="1" noChangeAspect="1"/>
+          </p:cNvSpPr>
           <p:nvPr>
             <p:ph type="sldImg" idx="2"/>
           </p:nvPr>
@@ -921,11 +915,11 @@
 </file>
 
 <file path=ppt/notesSlides/notesSlide3.xml><?xml version="1.0" encoding="utf-8"?>
-<p:notes xmlns:a="http://schemas.openxmlformats.org/drawingml/2006/main" xmlns:r="http://schemas.openxmlformats.org/officeDocument/2006/relationships" xmlns:p="http://schemas.openxmlformats.org/presentationml/2006/main" showMasterPhAnim="0" showMasterSp="0">
+<p:notes xmlns:a="http://schemas.openxmlformats.org/drawingml/2006/main" xmlns:r="http://schemas.openxmlformats.org/officeDocument/2006/relationships" xmlns:p="http://schemas.openxmlformats.org/presentationml/2006/main" showMasterSp="0" showMasterPhAnim="0">
   <p:cSld>
     <p:spTree>
       <p:nvGrpSpPr>
-        <p:cNvPr id="103" name="Shape 103"/>
+        <p:cNvPr id="1" name="Shape 103"/>
         <p:cNvGrpSpPr/>
         <p:nvPr/>
       </p:nvGrpSpPr>
@@ -940,7 +934,9 @@
       <p:sp>
         <p:nvSpPr>
           <p:cNvPr id="104" name="Google Shape;104;p3:notes"/>
-          <p:cNvSpPr txBox="1"/>
+          <p:cNvSpPr txBox="1">
+            <a:spLocks noGrp="1"/>
+          </p:cNvSpPr>
           <p:nvPr>
             <p:ph type="body" idx="1"/>
           </p:nvPr>
@@ -969,13 +965,16 @@
               </a:spcAft>
               <a:buNone/>
             </a:pPr>
+            <a:endParaRPr/>
           </a:p>
         </p:txBody>
       </p:sp>
       <p:sp>
         <p:nvSpPr>
           <p:cNvPr id="105" name="Google Shape;105;p3:notes"/>
-          <p:cNvSpPr/>
+          <p:cNvSpPr>
+            <a:spLocks noGrp="1" noRot="1" noChangeAspect="1"/>
+          </p:cNvSpPr>
           <p:nvPr>
             <p:ph type="sldImg" idx="2"/>
           </p:nvPr>
@@ -1020,11 +1019,11 @@
 </file>
 
 <file path=ppt/notesSlides/notesSlide4.xml><?xml version="1.0" encoding="utf-8"?>
-<p:notes xmlns:a="http://schemas.openxmlformats.org/drawingml/2006/main" xmlns:r="http://schemas.openxmlformats.org/officeDocument/2006/relationships" xmlns:p="http://schemas.openxmlformats.org/presentationml/2006/main" showMasterPhAnim="0" showMasterSp="0">
+<p:notes xmlns:a="http://schemas.openxmlformats.org/drawingml/2006/main" xmlns:r="http://schemas.openxmlformats.org/officeDocument/2006/relationships" xmlns:p="http://schemas.openxmlformats.org/presentationml/2006/main" showMasterSp="0" showMasterPhAnim="0">
   <p:cSld>
     <p:spTree>
       <p:nvGrpSpPr>
-        <p:cNvPr id="120" name="Shape 120"/>
+        <p:cNvPr id="1" name="Shape 120"/>
         <p:cNvGrpSpPr/>
         <p:nvPr/>
       </p:nvGrpSpPr>
@@ -1039,7 +1038,9 @@
       <p:sp>
         <p:nvSpPr>
           <p:cNvPr id="121" name="Google Shape;121;p4:notes"/>
-          <p:cNvSpPr txBox="1"/>
+          <p:cNvSpPr txBox="1">
+            <a:spLocks noGrp="1"/>
+          </p:cNvSpPr>
           <p:nvPr>
             <p:ph type="body" idx="1"/>
           </p:nvPr>
@@ -1068,13 +1069,16 @@
               </a:spcAft>
               <a:buNone/>
             </a:pPr>
+            <a:endParaRPr/>
           </a:p>
         </p:txBody>
       </p:sp>
       <p:sp>
         <p:nvSpPr>
           <p:cNvPr id="122" name="Google Shape;122;p4:notes"/>
-          <p:cNvSpPr/>
+          <p:cNvSpPr>
+            <a:spLocks noGrp="1" noRot="1" noChangeAspect="1"/>
+          </p:cNvSpPr>
           <p:nvPr>
             <p:ph type="sldImg" idx="2"/>
           </p:nvPr>
@@ -1119,11 +1123,11 @@
 </file>
 
 <file path=ppt/notesSlides/notesSlide5.xml><?xml version="1.0" encoding="utf-8"?>
-<p:notes xmlns:a="http://schemas.openxmlformats.org/drawingml/2006/main" xmlns:r="http://schemas.openxmlformats.org/officeDocument/2006/relationships" xmlns:p="http://schemas.openxmlformats.org/presentationml/2006/main" showMasterPhAnim="0" showMasterSp="0">
+<p:notes xmlns:a="http://schemas.openxmlformats.org/drawingml/2006/main" xmlns:r="http://schemas.openxmlformats.org/officeDocument/2006/relationships" xmlns:p="http://schemas.openxmlformats.org/presentationml/2006/main" showMasterSp="0" showMasterPhAnim="0">
   <p:cSld>
     <p:spTree>
       <p:nvGrpSpPr>
-        <p:cNvPr id="145" name="Shape 145"/>
+        <p:cNvPr id="1" name="Shape 145"/>
         <p:cNvGrpSpPr/>
         <p:nvPr/>
       </p:nvGrpSpPr>
@@ -1138,7 +1142,9 @@
       <p:sp>
         <p:nvSpPr>
           <p:cNvPr id="146" name="Google Shape;146;p5:notes"/>
-          <p:cNvSpPr txBox="1"/>
+          <p:cNvSpPr txBox="1">
+            <a:spLocks noGrp="1"/>
+          </p:cNvSpPr>
           <p:nvPr>
             <p:ph type="body" idx="1"/>
           </p:nvPr>
@@ -1167,13 +1173,16 @@
               </a:spcAft>
               <a:buNone/>
             </a:pPr>
+            <a:endParaRPr/>
           </a:p>
         </p:txBody>
       </p:sp>
       <p:sp>
         <p:nvSpPr>
           <p:cNvPr id="147" name="Google Shape;147;p5:notes"/>
-          <p:cNvSpPr/>
+          <p:cNvSpPr>
+            <a:spLocks noGrp="1" noRot="1" noChangeAspect="1"/>
+          </p:cNvSpPr>
           <p:nvPr>
             <p:ph type="sldImg" idx="2"/>
           </p:nvPr>
@@ -1218,11 +1227,11 @@
 </file>
 
 <file path=ppt/notesSlides/notesSlide6.xml><?xml version="1.0" encoding="utf-8"?>
-<p:notes xmlns:a="http://schemas.openxmlformats.org/drawingml/2006/main" xmlns:r="http://schemas.openxmlformats.org/officeDocument/2006/relationships" xmlns:p="http://schemas.openxmlformats.org/presentationml/2006/main" showMasterPhAnim="0" showMasterSp="0">
+<p:notes xmlns:a="http://schemas.openxmlformats.org/drawingml/2006/main" xmlns:r="http://schemas.openxmlformats.org/officeDocument/2006/relationships" xmlns:p="http://schemas.openxmlformats.org/presentationml/2006/main" showMasterSp="0" showMasterPhAnim="0">
   <p:cSld>
     <p:spTree>
       <p:nvGrpSpPr>
-        <p:cNvPr id="166" name="Shape 166"/>
+        <p:cNvPr id="1" name="Shape 166"/>
         <p:cNvGrpSpPr/>
         <p:nvPr/>
       </p:nvGrpSpPr>
@@ -1237,7 +1246,9 @@
       <p:sp>
         <p:nvSpPr>
           <p:cNvPr id="167" name="Google Shape;167;p6:notes"/>
-          <p:cNvSpPr txBox="1"/>
+          <p:cNvSpPr txBox="1">
+            <a:spLocks noGrp="1"/>
+          </p:cNvSpPr>
           <p:nvPr>
             <p:ph type="body" idx="1"/>
           </p:nvPr>
@@ -1266,13 +1277,16 @@
               </a:spcAft>
               <a:buNone/>
             </a:pPr>
+            <a:endParaRPr/>
           </a:p>
         </p:txBody>
       </p:sp>
       <p:sp>
         <p:nvSpPr>
           <p:cNvPr id="168" name="Google Shape;168;p6:notes"/>
-          <p:cNvSpPr/>
+          <p:cNvSpPr>
+            <a:spLocks noGrp="1" noRot="1" noChangeAspect="1"/>
+          </p:cNvSpPr>
           <p:nvPr>
             <p:ph type="sldImg" idx="2"/>
           </p:nvPr>
@@ -1317,11 +1331,11 @@
 </file>
 
 <file path=ppt/slideLayouts/slideLayout1.xml><?xml version="1.0" encoding="utf-8"?>
-<p:sldLayout xmlns:a="http://schemas.openxmlformats.org/drawingml/2006/main" xmlns:r="http://schemas.openxmlformats.org/officeDocument/2006/relationships" xmlns:p="http://schemas.openxmlformats.org/presentationml/2006/main" type="blank" matchingName="Blank">
+<p:sldLayout xmlns:a="http://schemas.openxmlformats.org/drawingml/2006/main" xmlns:r="http://schemas.openxmlformats.org/officeDocument/2006/relationships" xmlns:p="http://schemas.openxmlformats.org/presentationml/2006/main" matchingName="Blank" type="blank">
   <p:cSld name="BLANK">
     <p:spTree>
       <p:nvGrpSpPr>
-        <p:cNvPr id="11" name="Shape 11"/>
+        <p:cNvPr id="1" name="Shape 11"/>
         <p:cNvGrpSpPr/>
         <p:nvPr/>
       </p:nvGrpSpPr>
@@ -1336,7 +1350,9 @@
       <p:sp>
         <p:nvSpPr>
           <p:cNvPr id="12" name="Google Shape;12;p2"/>
-          <p:cNvSpPr txBox="1"/>
+          <p:cNvSpPr txBox="1">
+            <a:spLocks noGrp="1"/>
+          </p:cNvSpPr>
           <p:nvPr>
             <p:ph type="dt" idx="10"/>
           </p:nvPr>
@@ -1459,13 +1475,17 @@
               <a:defRPr/>
             </a:lvl9pPr>
           </a:lstStyle>
-          <a:p/>
+          <a:p>
+            <a:endParaRPr/>
+          </a:p>
         </p:txBody>
       </p:sp>
       <p:sp>
         <p:nvSpPr>
           <p:cNvPr id="13" name="Google Shape;13;p2"/>
-          <p:cNvSpPr txBox="1"/>
+          <p:cNvSpPr txBox="1">
+            <a:spLocks noGrp="1"/>
+          </p:cNvSpPr>
           <p:nvPr>
             <p:ph type="ftr" idx="11"/>
           </p:nvPr>
@@ -1588,13 +1608,17 @@
               <a:defRPr/>
             </a:lvl9pPr>
           </a:lstStyle>
-          <a:p/>
+          <a:p>
+            <a:endParaRPr/>
+          </a:p>
         </p:txBody>
       </p:sp>
       <p:sp>
         <p:nvSpPr>
           <p:cNvPr id="14" name="Google Shape;14;p2"/>
-          <p:cNvSpPr txBox="1"/>
+          <p:cNvSpPr txBox="1">
+            <a:spLocks noGrp="1"/>
+          </p:cNvSpPr>
           <p:nvPr>
             <p:ph type="sldNum" idx="12"/>
           </p:nvPr>
@@ -1693,6 +1717,7 @@
             </a:pPr>
             <a:fld id="{00000000-1234-1234-1234-123412341234}" type="slidenum">
               <a:rPr lang="en-US"/>
+              <a:t>‹#›</a:t>
             </a:fld>
             <a:endParaRPr lang="en-US"/>
           </a:p>
@@ -1707,11 +1732,11 @@
 </file>
 
 <file path=ppt/slideLayouts/slideLayout10.xml><?xml version="1.0" encoding="utf-8"?>
-<p:sldLayout xmlns:a="http://schemas.openxmlformats.org/drawingml/2006/main" xmlns:r="http://schemas.openxmlformats.org/officeDocument/2006/relationships" xmlns:p="http://schemas.openxmlformats.org/presentationml/2006/main" type="vertTx" matchingName="Title and Vertical Text">
+<p:sldLayout xmlns:a="http://schemas.openxmlformats.org/drawingml/2006/main" xmlns:r="http://schemas.openxmlformats.org/officeDocument/2006/relationships" xmlns:p="http://schemas.openxmlformats.org/presentationml/2006/main" matchingName="Title and Vertical Text" type="vertTx">
   <p:cSld name="VERTICAL_TEXT">
     <p:spTree>
       <p:nvGrpSpPr>
-        <p:cNvPr id="68" name="Shape 68"/>
+        <p:cNvPr id="1" name="Shape 68"/>
         <p:cNvGrpSpPr/>
         <p:nvPr/>
       </p:nvGrpSpPr>
@@ -1726,7 +1751,9 @@
       <p:sp>
         <p:nvSpPr>
           <p:cNvPr id="69" name="Google Shape;69;p11"/>
-          <p:cNvSpPr txBox="1"/>
+          <p:cNvSpPr txBox="1">
+            <a:spLocks noGrp="1"/>
+          </p:cNvSpPr>
           <p:nvPr>
             <p:ph type="title"/>
           </p:nvPr>
@@ -1852,13 +1879,17 @@
               <a:defRPr/>
             </a:lvl9pPr>
           </a:lstStyle>
-          <a:p/>
+          <a:p>
+            <a:endParaRPr/>
+          </a:p>
         </p:txBody>
       </p:sp>
       <p:sp>
         <p:nvSpPr>
           <p:cNvPr id="70" name="Google Shape;70;p11"/>
-          <p:cNvSpPr txBox="1"/>
+          <p:cNvSpPr txBox="1">
+            <a:spLocks noGrp="1"/>
+          </p:cNvSpPr>
           <p:nvPr>
             <p:ph type="body" idx="1"/>
           </p:nvPr>
@@ -2008,13 +2039,17 @@
               <a:defRPr/>
             </a:lvl9pPr>
           </a:lstStyle>
-          <a:p/>
+          <a:p>
+            <a:endParaRPr/>
+          </a:p>
         </p:txBody>
       </p:sp>
       <p:sp>
         <p:nvSpPr>
           <p:cNvPr id="71" name="Google Shape;71;p11"/>
-          <p:cNvSpPr txBox="1"/>
+          <p:cNvSpPr txBox="1">
+            <a:spLocks noGrp="1"/>
+          </p:cNvSpPr>
           <p:nvPr>
             <p:ph type="dt" idx="10"/>
           </p:nvPr>
@@ -2137,13 +2172,17 @@
               <a:defRPr/>
             </a:lvl9pPr>
           </a:lstStyle>
-          <a:p/>
+          <a:p>
+            <a:endParaRPr/>
+          </a:p>
         </p:txBody>
       </p:sp>
       <p:sp>
         <p:nvSpPr>
           <p:cNvPr id="72" name="Google Shape;72;p11"/>
-          <p:cNvSpPr txBox="1"/>
+          <p:cNvSpPr txBox="1">
+            <a:spLocks noGrp="1"/>
+          </p:cNvSpPr>
           <p:nvPr>
             <p:ph type="ftr" idx="11"/>
           </p:nvPr>
@@ -2266,13 +2305,17 @@
               <a:defRPr/>
             </a:lvl9pPr>
           </a:lstStyle>
-          <a:p/>
+          <a:p>
+            <a:endParaRPr/>
+          </a:p>
         </p:txBody>
       </p:sp>
       <p:sp>
         <p:nvSpPr>
           <p:cNvPr id="73" name="Google Shape;73;p11"/>
-          <p:cNvSpPr txBox="1"/>
+          <p:cNvSpPr txBox="1">
+            <a:spLocks noGrp="1"/>
+          </p:cNvSpPr>
           <p:nvPr>
             <p:ph type="sldNum" idx="12"/>
           </p:nvPr>
@@ -2371,6 +2414,7 @@
             </a:pPr>
             <a:fld id="{00000000-1234-1234-1234-123412341234}" type="slidenum">
               <a:rPr lang="en-US"/>
+              <a:t>‹#›</a:t>
             </a:fld>
             <a:endParaRPr lang="en-US"/>
           </a:p>
@@ -2385,11 +2429,11 @@
 </file>
 
 <file path=ppt/slideLayouts/slideLayout11.xml><?xml version="1.0" encoding="utf-8"?>
-<p:sldLayout xmlns:a="http://schemas.openxmlformats.org/drawingml/2006/main" xmlns:r="http://schemas.openxmlformats.org/officeDocument/2006/relationships" xmlns:p="http://schemas.openxmlformats.org/presentationml/2006/main" type="vertTitleAndTx" matchingName="Vertical Title and Text">
+<p:sldLayout xmlns:a="http://schemas.openxmlformats.org/drawingml/2006/main" xmlns:r="http://schemas.openxmlformats.org/officeDocument/2006/relationships" xmlns:p="http://schemas.openxmlformats.org/presentationml/2006/main" matchingName="Vertical Title and Text" type="vertTitleAndTx">
   <p:cSld name="VERTICAL_TITLE_AND_VERTICAL_TEXT">
     <p:spTree>
       <p:nvGrpSpPr>
-        <p:cNvPr id="74" name="Shape 74"/>
+        <p:cNvPr id="1" name="Shape 74"/>
         <p:cNvGrpSpPr/>
         <p:nvPr/>
       </p:nvGrpSpPr>
@@ -2404,7 +2448,9 @@
       <p:sp>
         <p:nvSpPr>
           <p:cNvPr id="75" name="Google Shape;75;p12"/>
-          <p:cNvSpPr txBox="1"/>
+          <p:cNvSpPr txBox="1">
+            <a:spLocks noGrp="1"/>
+          </p:cNvSpPr>
           <p:nvPr>
             <p:ph type="title"/>
           </p:nvPr>
@@ -2530,13 +2576,17 @@
               <a:defRPr/>
             </a:lvl9pPr>
           </a:lstStyle>
-          <a:p/>
+          <a:p>
+            <a:endParaRPr/>
+          </a:p>
         </p:txBody>
       </p:sp>
       <p:sp>
         <p:nvSpPr>
           <p:cNvPr id="76" name="Google Shape;76;p12"/>
-          <p:cNvSpPr txBox="1"/>
+          <p:cNvSpPr txBox="1">
+            <a:spLocks noGrp="1"/>
+          </p:cNvSpPr>
           <p:nvPr>
             <p:ph type="body" idx="1"/>
           </p:nvPr>
@@ -2686,13 +2736,17 @@
               <a:defRPr/>
             </a:lvl9pPr>
           </a:lstStyle>
-          <a:p/>
+          <a:p>
+            <a:endParaRPr/>
+          </a:p>
         </p:txBody>
       </p:sp>
       <p:sp>
         <p:nvSpPr>
           <p:cNvPr id="77" name="Google Shape;77;p12"/>
-          <p:cNvSpPr txBox="1"/>
+          <p:cNvSpPr txBox="1">
+            <a:spLocks noGrp="1"/>
+          </p:cNvSpPr>
           <p:nvPr>
             <p:ph type="dt" idx="10"/>
           </p:nvPr>
@@ -2815,13 +2869,17 @@
               <a:defRPr/>
             </a:lvl9pPr>
           </a:lstStyle>
-          <a:p/>
+          <a:p>
+            <a:endParaRPr/>
+          </a:p>
         </p:txBody>
       </p:sp>
       <p:sp>
         <p:nvSpPr>
           <p:cNvPr id="78" name="Google Shape;78;p12"/>
-          <p:cNvSpPr txBox="1"/>
+          <p:cNvSpPr txBox="1">
+            <a:spLocks noGrp="1"/>
+          </p:cNvSpPr>
           <p:nvPr>
             <p:ph type="ftr" idx="11"/>
           </p:nvPr>
@@ -2944,13 +3002,17 @@
               <a:defRPr/>
             </a:lvl9pPr>
           </a:lstStyle>
-          <a:p/>
+          <a:p>
+            <a:endParaRPr/>
+          </a:p>
         </p:txBody>
       </p:sp>
       <p:sp>
         <p:nvSpPr>
           <p:cNvPr id="79" name="Google Shape;79;p12"/>
-          <p:cNvSpPr txBox="1"/>
+          <p:cNvSpPr txBox="1">
+            <a:spLocks noGrp="1"/>
+          </p:cNvSpPr>
           <p:nvPr>
             <p:ph type="sldNum" idx="12"/>
           </p:nvPr>
@@ -3049,6 +3111,7 @@
             </a:pPr>
             <a:fld id="{00000000-1234-1234-1234-123412341234}" type="slidenum">
               <a:rPr lang="en-US"/>
+              <a:t>‹#›</a:t>
             </a:fld>
             <a:endParaRPr lang="en-US"/>
           </a:p>
@@ -3063,11 +3126,11 @@
 </file>
 
 <file path=ppt/slideLayouts/slideLayout2.xml><?xml version="1.0" encoding="utf-8"?>
-<p:sldLayout xmlns:a="http://schemas.openxmlformats.org/drawingml/2006/main" xmlns:r="http://schemas.openxmlformats.org/officeDocument/2006/relationships" xmlns:p="http://schemas.openxmlformats.org/presentationml/2006/main" type="title" matchingName="Title Slide">
+<p:sldLayout xmlns:a="http://schemas.openxmlformats.org/drawingml/2006/main" xmlns:r="http://schemas.openxmlformats.org/officeDocument/2006/relationships" xmlns:p="http://schemas.openxmlformats.org/presentationml/2006/main" matchingName="Title Slide" type="title">
   <p:cSld name="TITLE">
     <p:spTree>
       <p:nvGrpSpPr>
-        <p:cNvPr id="15" name="Shape 15"/>
+        <p:cNvPr id="1" name="Shape 15"/>
         <p:cNvGrpSpPr/>
         <p:nvPr/>
       </p:nvGrpSpPr>
@@ -3082,7 +3145,9 @@
       <p:sp>
         <p:nvSpPr>
           <p:cNvPr id="16" name="Google Shape;16;p3"/>
-          <p:cNvSpPr txBox="1"/>
+          <p:cNvSpPr txBox="1">
+            <a:spLocks noGrp="1"/>
+          </p:cNvSpPr>
           <p:nvPr>
             <p:ph type="ctrTitle"/>
           </p:nvPr>
@@ -3208,13 +3273,17 @@
               <a:defRPr/>
             </a:lvl9pPr>
           </a:lstStyle>
-          <a:p/>
+          <a:p>
+            <a:endParaRPr/>
+          </a:p>
         </p:txBody>
       </p:sp>
       <p:sp>
         <p:nvSpPr>
           <p:cNvPr id="17" name="Google Shape;17;p3"/>
-          <p:cNvSpPr txBox="1"/>
+          <p:cNvSpPr txBox="1">
+            <a:spLocks noGrp="1"/>
+          </p:cNvSpPr>
           <p:nvPr>
             <p:ph type="subTitle" idx="1"/>
           </p:nvPr>
@@ -3400,13 +3469,17 @@
               </a:defRPr>
             </a:lvl9pPr>
           </a:lstStyle>
-          <a:p/>
+          <a:p>
+            <a:endParaRPr/>
+          </a:p>
         </p:txBody>
       </p:sp>
       <p:sp>
         <p:nvSpPr>
           <p:cNvPr id="18" name="Google Shape;18;p3"/>
-          <p:cNvSpPr txBox="1"/>
+          <p:cNvSpPr txBox="1">
+            <a:spLocks noGrp="1"/>
+          </p:cNvSpPr>
           <p:nvPr>
             <p:ph type="dt" idx="10"/>
           </p:nvPr>
@@ -3529,13 +3602,17 @@
               <a:defRPr/>
             </a:lvl9pPr>
           </a:lstStyle>
-          <a:p/>
+          <a:p>
+            <a:endParaRPr/>
+          </a:p>
         </p:txBody>
       </p:sp>
       <p:sp>
         <p:nvSpPr>
           <p:cNvPr id="19" name="Google Shape;19;p3"/>
-          <p:cNvSpPr txBox="1"/>
+          <p:cNvSpPr txBox="1">
+            <a:spLocks noGrp="1"/>
+          </p:cNvSpPr>
           <p:nvPr>
             <p:ph type="ftr" idx="11"/>
           </p:nvPr>
@@ -3658,13 +3735,17 @@
               <a:defRPr/>
             </a:lvl9pPr>
           </a:lstStyle>
-          <a:p/>
+          <a:p>
+            <a:endParaRPr/>
+          </a:p>
         </p:txBody>
       </p:sp>
       <p:sp>
         <p:nvSpPr>
           <p:cNvPr id="20" name="Google Shape;20;p3"/>
-          <p:cNvSpPr txBox="1"/>
+          <p:cNvSpPr txBox="1">
+            <a:spLocks noGrp="1"/>
+          </p:cNvSpPr>
           <p:nvPr>
             <p:ph type="sldNum" idx="12"/>
           </p:nvPr>
@@ -3763,6 +3844,7 @@
             </a:pPr>
             <a:fld id="{00000000-1234-1234-1234-123412341234}" type="slidenum">
               <a:rPr lang="en-US"/>
+              <a:t>‹#›</a:t>
             </a:fld>
             <a:endParaRPr lang="en-US"/>
           </a:p>
@@ -3777,11 +3859,11 @@
 </file>
 
 <file path=ppt/slideLayouts/slideLayout3.xml><?xml version="1.0" encoding="utf-8"?>
-<p:sldLayout xmlns:a="http://schemas.openxmlformats.org/drawingml/2006/main" xmlns:r="http://schemas.openxmlformats.org/officeDocument/2006/relationships" xmlns:p="http://schemas.openxmlformats.org/presentationml/2006/main" type="obj" matchingName="Title and Content">
+<p:sldLayout xmlns:a="http://schemas.openxmlformats.org/drawingml/2006/main" xmlns:r="http://schemas.openxmlformats.org/officeDocument/2006/relationships" xmlns:p="http://schemas.openxmlformats.org/presentationml/2006/main" matchingName="Title and Content" type="obj">
   <p:cSld name="OBJECT">
     <p:spTree>
       <p:nvGrpSpPr>
-        <p:cNvPr id="21" name="Shape 21"/>
+        <p:cNvPr id="1" name="Shape 21"/>
         <p:cNvGrpSpPr/>
         <p:nvPr/>
       </p:nvGrpSpPr>
@@ -3796,7 +3878,9 @@
       <p:sp>
         <p:nvSpPr>
           <p:cNvPr id="22" name="Google Shape;22;p4"/>
-          <p:cNvSpPr txBox="1"/>
+          <p:cNvSpPr txBox="1">
+            <a:spLocks noGrp="1"/>
+          </p:cNvSpPr>
           <p:nvPr>
             <p:ph type="title"/>
           </p:nvPr>
@@ -3922,13 +4006,17 @@
               <a:defRPr/>
             </a:lvl9pPr>
           </a:lstStyle>
-          <a:p/>
+          <a:p>
+            <a:endParaRPr/>
+          </a:p>
         </p:txBody>
       </p:sp>
       <p:sp>
         <p:nvSpPr>
           <p:cNvPr id="23" name="Google Shape;23;p4"/>
-          <p:cNvSpPr txBox="1"/>
+          <p:cNvSpPr txBox="1">
+            <a:spLocks noGrp="1"/>
+          </p:cNvSpPr>
           <p:nvPr>
             <p:ph type="body" idx="1"/>
           </p:nvPr>
@@ -4078,13 +4166,17 @@
               <a:defRPr/>
             </a:lvl9pPr>
           </a:lstStyle>
-          <a:p/>
+          <a:p>
+            <a:endParaRPr/>
+          </a:p>
         </p:txBody>
       </p:sp>
       <p:sp>
         <p:nvSpPr>
           <p:cNvPr id="24" name="Google Shape;24;p4"/>
-          <p:cNvSpPr txBox="1"/>
+          <p:cNvSpPr txBox="1">
+            <a:spLocks noGrp="1"/>
+          </p:cNvSpPr>
           <p:nvPr>
             <p:ph type="dt" idx="10"/>
           </p:nvPr>
@@ -4207,13 +4299,17 @@
               <a:defRPr/>
             </a:lvl9pPr>
           </a:lstStyle>
-          <a:p/>
+          <a:p>
+            <a:endParaRPr/>
+          </a:p>
         </p:txBody>
       </p:sp>
       <p:sp>
         <p:nvSpPr>
           <p:cNvPr id="25" name="Google Shape;25;p4"/>
-          <p:cNvSpPr txBox="1"/>
+          <p:cNvSpPr txBox="1">
+            <a:spLocks noGrp="1"/>
+          </p:cNvSpPr>
           <p:nvPr>
             <p:ph type="ftr" idx="11"/>
           </p:nvPr>
@@ -4336,13 +4432,17 @@
               <a:defRPr/>
             </a:lvl9pPr>
           </a:lstStyle>
-          <a:p/>
+          <a:p>
+            <a:endParaRPr/>
+          </a:p>
         </p:txBody>
       </p:sp>
       <p:sp>
         <p:nvSpPr>
           <p:cNvPr id="26" name="Google Shape;26;p4"/>
-          <p:cNvSpPr txBox="1"/>
+          <p:cNvSpPr txBox="1">
+            <a:spLocks noGrp="1"/>
+          </p:cNvSpPr>
           <p:nvPr>
             <p:ph type="sldNum" idx="12"/>
           </p:nvPr>
@@ -4441,6 +4541,7 @@
             </a:pPr>
             <a:fld id="{00000000-1234-1234-1234-123412341234}" type="slidenum">
               <a:rPr lang="en-US"/>
+              <a:t>‹#›</a:t>
             </a:fld>
             <a:endParaRPr lang="en-US"/>
           </a:p>
@@ -4455,11 +4556,11 @@
 </file>
 
 <file path=ppt/slideLayouts/slideLayout4.xml><?xml version="1.0" encoding="utf-8"?>
-<p:sldLayout xmlns:a="http://schemas.openxmlformats.org/drawingml/2006/main" xmlns:r="http://schemas.openxmlformats.org/officeDocument/2006/relationships" xmlns:p="http://schemas.openxmlformats.org/presentationml/2006/main" type="secHead" matchingName="Section Header">
+<p:sldLayout xmlns:a="http://schemas.openxmlformats.org/drawingml/2006/main" xmlns:r="http://schemas.openxmlformats.org/officeDocument/2006/relationships" xmlns:p="http://schemas.openxmlformats.org/presentationml/2006/main" matchingName="Section Header" type="secHead">
   <p:cSld name="SECTION_HEADER">
     <p:spTree>
       <p:nvGrpSpPr>
-        <p:cNvPr id="27" name="Shape 27"/>
+        <p:cNvPr id="1" name="Shape 27"/>
         <p:cNvGrpSpPr/>
         <p:nvPr/>
       </p:nvGrpSpPr>
@@ -4474,7 +4575,9 @@
       <p:sp>
         <p:nvSpPr>
           <p:cNvPr id="28" name="Google Shape;28;p5"/>
-          <p:cNvSpPr txBox="1"/>
+          <p:cNvSpPr txBox="1">
+            <a:spLocks noGrp="1"/>
+          </p:cNvSpPr>
           <p:nvPr>
             <p:ph type="title"/>
           </p:nvPr>
@@ -4601,13 +4704,17 @@
               <a:defRPr/>
             </a:lvl9pPr>
           </a:lstStyle>
-          <a:p/>
+          <a:p>
+            <a:endParaRPr/>
+          </a:p>
         </p:txBody>
       </p:sp>
       <p:sp>
         <p:nvSpPr>
           <p:cNvPr id="29" name="Google Shape;29;p5"/>
-          <p:cNvSpPr txBox="1"/>
+          <p:cNvSpPr txBox="1">
+            <a:spLocks noGrp="1"/>
+          </p:cNvSpPr>
           <p:nvPr>
             <p:ph type="body" idx="1"/>
           </p:nvPr>
@@ -4793,13 +4900,17 @@
               </a:defRPr>
             </a:lvl9pPr>
           </a:lstStyle>
-          <a:p/>
+          <a:p>
+            <a:endParaRPr/>
+          </a:p>
         </p:txBody>
       </p:sp>
       <p:sp>
         <p:nvSpPr>
           <p:cNvPr id="30" name="Google Shape;30;p5"/>
-          <p:cNvSpPr txBox="1"/>
+          <p:cNvSpPr txBox="1">
+            <a:spLocks noGrp="1"/>
+          </p:cNvSpPr>
           <p:nvPr>
             <p:ph type="dt" idx="10"/>
           </p:nvPr>
@@ -4922,13 +5033,17 @@
               <a:defRPr/>
             </a:lvl9pPr>
           </a:lstStyle>
-          <a:p/>
+          <a:p>
+            <a:endParaRPr/>
+          </a:p>
         </p:txBody>
       </p:sp>
       <p:sp>
         <p:nvSpPr>
           <p:cNvPr id="31" name="Google Shape;31;p5"/>
-          <p:cNvSpPr txBox="1"/>
+          <p:cNvSpPr txBox="1">
+            <a:spLocks noGrp="1"/>
+          </p:cNvSpPr>
           <p:nvPr>
             <p:ph type="ftr" idx="11"/>
           </p:nvPr>
@@ -5051,13 +5166,17 @@
               <a:defRPr/>
             </a:lvl9pPr>
           </a:lstStyle>
-          <a:p/>
+          <a:p>
+            <a:endParaRPr/>
+          </a:p>
         </p:txBody>
       </p:sp>
       <p:sp>
         <p:nvSpPr>
           <p:cNvPr id="32" name="Google Shape;32;p5"/>
-          <p:cNvSpPr txBox="1"/>
+          <p:cNvSpPr txBox="1">
+            <a:spLocks noGrp="1"/>
+          </p:cNvSpPr>
           <p:nvPr>
             <p:ph type="sldNum" idx="12"/>
           </p:nvPr>
@@ -5156,6 +5275,7 @@
             </a:pPr>
             <a:fld id="{00000000-1234-1234-1234-123412341234}" type="slidenum">
               <a:rPr lang="en-US"/>
+              <a:t>‹#›</a:t>
             </a:fld>
             <a:endParaRPr lang="en-US"/>
           </a:p>
@@ -5170,11 +5290,11 @@
 </file>
 
 <file path=ppt/slideLayouts/slideLayout5.xml><?xml version="1.0" encoding="utf-8"?>
-<p:sldLayout xmlns:a="http://schemas.openxmlformats.org/drawingml/2006/main" xmlns:r="http://schemas.openxmlformats.org/officeDocument/2006/relationships" xmlns:p="http://schemas.openxmlformats.org/presentationml/2006/main" type="twoObj" matchingName="Two Content">
+<p:sldLayout xmlns:a="http://schemas.openxmlformats.org/drawingml/2006/main" xmlns:r="http://schemas.openxmlformats.org/officeDocument/2006/relationships" xmlns:p="http://schemas.openxmlformats.org/presentationml/2006/main" matchingName="Two Content" type="twoObj">
   <p:cSld name="TWO_OBJECTS">
     <p:spTree>
       <p:nvGrpSpPr>
-        <p:cNvPr id="33" name="Shape 33"/>
+        <p:cNvPr id="1" name="Shape 33"/>
         <p:cNvGrpSpPr/>
         <p:nvPr/>
       </p:nvGrpSpPr>
@@ -5189,7 +5309,9 @@
       <p:sp>
         <p:nvSpPr>
           <p:cNvPr id="34" name="Google Shape;34;p6"/>
-          <p:cNvSpPr txBox="1"/>
+          <p:cNvSpPr txBox="1">
+            <a:spLocks noGrp="1"/>
+          </p:cNvSpPr>
           <p:nvPr>
             <p:ph type="title"/>
           </p:nvPr>
@@ -5315,13 +5437,17 @@
               <a:defRPr/>
             </a:lvl9pPr>
           </a:lstStyle>
-          <a:p/>
+          <a:p>
+            <a:endParaRPr/>
+          </a:p>
         </p:txBody>
       </p:sp>
       <p:sp>
         <p:nvSpPr>
           <p:cNvPr id="35" name="Google Shape;35;p6"/>
-          <p:cNvSpPr txBox="1"/>
+          <p:cNvSpPr txBox="1">
+            <a:spLocks noGrp="1"/>
+          </p:cNvSpPr>
           <p:nvPr>
             <p:ph type="body" idx="1"/>
           </p:nvPr>
@@ -5471,13 +5597,17 @@
               <a:defRPr sz="1800"/>
             </a:lvl9pPr>
           </a:lstStyle>
-          <a:p/>
+          <a:p>
+            <a:endParaRPr/>
+          </a:p>
         </p:txBody>
       </p:sp>
       <p:sp>
         <p:nvSpPr>
           <p:cNvPr id="36" name="Google Shape;36;p6"/>
-          <p:cNvSpPr txBox="1"/>
+          <p:cNvSpPr txBox="1">
+            <a:spLocks noGrp="1"/>
+          </p:cNvSpPr>
           <p:nvPr>
             <p:ph type="body" idx="2"/>
           </p:nvPr>
@@ -5627,13 +5757,17 @@
               <a:defRPr sz="1800"/>
             </a:lvl9pPr>
           </a:lstStyle>
-          <a:p/>
+          <a:p>
+            <a:endParaRPr/>
+          </a:p>
         </p:txBody>
       </p:sp>
       <p:sp>
         <p:nvSpPr>
           <p:cNvPr id="37" name="Google Shape;37;p6"/>
-          <p:cNvSpPr txBox="1"/>
+          <p:cNvSpPr txBox="1">
+            <a:spLocks noGrp="1"/>
+          </p:cNvSpPr>
           <p:nvPr>
             <p:ph type="dt" idx="10"/>
           </p:nvPr>
@@ -5756,13 +5890,17 @@
               <a:defRPr/>
             </a:lvl9pPr>
           </a:lstStyle>
-          <a:p/>
+          <a:p>
+            <a:endParaRPr/>
+          </a:p>
         </p:txBody>
       </p:sp>
       <p:sp>
         <p:nvSpPr>
           <p:cNvPr id="38" name="Google Shape;38;p6"/>
-          <p:cNvSpPr txBox="1"/>
+          <p:cNvSpPr txBox="1">
+            <a:spLocks noGrp="1"/>
+          </p:cNvSpPr>
           <p:nvPr>
             <p:ph type="ftr" idx="11"/>
           </p:nvPr>
@@ -5885,13 +6023,17 @@
               <a:defRPr/>
             </a:lvl9pPr>
           </a:lstStyle>
-          <a:p/>
+          <a:p>
+            <a:endParaRPr/>
+          </a:p>
         </p:txBody>
       </p:sp>
       <p:sp>
         <p:nvSpPr>
           <p:cNvPr id="39" name="Google Shape;39;p6"/>
-          <p:cNvSpPr txBox="1"/>
+          <p:cNvSpPr txBox="1">
+            <a:spLocks noGrp="1"/>
+          </p:cNvSpPr>
           <p:nvPr>
             <p:ph type="sldNum" idx="12"/>
           </p:nvPr>
@@ -5990,6 +6132,7 @@
             </a:pPr>
             <a:fld id="{00000000-1234-1234-1234-123412341234}" type="slidenum">
               <a:rPr lang="en-US"/>
+              <a:t>‹#›</a:t>
             </a:fld>
             <a:endParaRPr lang="en-US"/>
           </a:p>
@@ -6004,11 +6147,11 @@
 </file>
 
 <file path=ppt/slideLayouts/slideLayout6.xml><?xml version="1.0" encoding="utf-8"?>
-<p:sldLayout xmlns:a="http://schemas.openxmlformats.org/drawingml/2006/main" xmlns:r="http://schemas.openxmlformats.org/officeDocument/2006/relationships" xmlns:p="http://schemas.openxmlformats.org/presentationml/2006/main" type="twoTxTwoObj" matchingName="Comparison">
+<p:sldLayout xmlns:a="http://schemas.openxmlformats.org/drawingml/2006/main" xmlns:r="http://schemas.openxmlformats.org/officeDocument/2006/relationships" xmlns:p="http://schemas.openxmlformats.org/presentationml/2006/main" matchingName="Comparison" type="twoTxTwoObj">
   <p:cSld name="TWO_OBJECTS_WITH_TEXT">
     <p:spTree>
       <p:nvGrpSpPr>
-        <p:cNvPr id="40" name="Shape 40"/>
+        <p:cNvPr id="1" name="Shape 40"/>
         <p:cNvGrpSpPr/>
         <p:nvPr/>
       </p:nvGrpSpPr>
@@ -6023,7 +6166,9 @@
       <p:sp>
         <p:nvSpPr>
           <p:cNvPr id="41" name="Google Shape;41;p7"/>
-          <p:cNvSpPr txBox="1"/>
+          <p:cNvSpPr txBox="1">
+            <a:spLocks noGrp="1"/>
+          </p:cNvSpPr>
           <p:nvPr>
             <p:ph type="title"/>
           </p:nvPr>
@@ -6150,13 +6295,17 @@
               <a:defRPr/>
             </a:lvl9pPr>
           </a:lstStyle>
-          <a:p/>
+          <a:p>
+            <a:endParaRPr/>
+          </a:p>
         </p:txBody>
       </p:sp>
       <p:sp>
         <p:nvSpPr>
           <p:cNvPr id="42" name="Google Shape;42;p7"/>
-          <p:cNvSpPr txBox="1"/>
+          <p:cNvSpPr txBox="1">
+            <a:spLocks noGrp="1"/>
+          </p:cNvSpPr>
           <p:nvPr>
             <p:ph type="body" idx="1"/>
           </p:nvPr>
@@ -6306,13 +6455,17 @@
               <a:defRPr sz="1600" b="1"/>
             </a:lvl9pPr>
           </a:lstStyle>
-          <a:p/>
+          <a:p>
+            <a:endParaRPr/>
+          </a:p>
         </p:txBody>
       </p:sp>
       <p:sp>
         <p:nvSpPr>
           <p:cNvPr id="43" name="Google Shape;43;p7"/>
-          <p:cNvSpPr txBox="1"/>
+          <p:cNvSpPr txBox="1">
+            <a:spLocks noGrp="1"/>
+          </p:cNvSpPr>
           <p:nvPr>
             <p:ph type="body" idx="2"/>
           </p:nvPr>
@@ -6462,13 +6615,17 @@
               <a:defRPr sz="1600"/>
             </a:lvl9pPr>
           </a:lstStyle>
-          <a:p/>
+          <a:p>
+            <a:endParaRPr/>
+          </a:p>
         </p:txBody>
       </p:sp>
       <p:sp>
         <p:nvSpPr>
           <p:cNvPr id="44" name="Google Shape;44;p7"/>
-          <p:cNvSpPr txBox="1"/>
+          <p:cNvSpPr txBox="1">
+            <a:spLocks noGrp="1"/>
+          </p:cNvSpPr>
           <p:nvPr>
             <p:ph type="body" idx="3"/>
           </p:nvPr>
@@ -6618,13 +6775,17 @@
               <a:defRPr sz="1600" b="1"/>
             </a:lvl9pPr>
           </a:lstStyle>
-          <a:p/>
+          <a:p>
+            <a:endParaRPr/>
+          </a:p>
         </p:txBody>
       </p:sp>
       <p:sp>
         <p:nvSpPr>
           <p:cNvPr id="45" name="Google Shape;45;p7"/>
-          <p:cNvSpPr txBox="1"/>
+          <p:cNvSpPr txBox="1">
+            <a:spLocks noGrp="1"/>
+          </p:cNvSpPr>
           <p:nvPr>
             <p:ph type="body" idx="4"/>
           </p:nvPr>
@@ -6774,13 +6935,17 @@
               <a:defRPr sz="1600"/>
             </a:lvl9pPr>
           </a:lstStyle>
-          <a:p/>
+          <a:p>
+            <a:endParaRPr/>
+          </a:p>
         </p:txBody>
       </p:sp>
       <p:sp>
         <p:nvSpPr>
           <p:cNvPr id="46" name="Google Shape;46;p7"/>
-          <p:cNvSpPr txBox="1"/>
+          <p:cNvSpPr txBox="1">
+            <a:spLocks noGrp="1"/>
+          </p:cNvSpPr>
           <p:nvPr>
             <p:ph type="dt" idx="10"/>
           </p:nvPr>
@@ -6903,13 +7068,17 @@
               <a:defRPr/>
             </a:lvl9pPr>
           </a:lstStyle>
-          <a:p/>
+          <a:p>
+            <a:endParaRPr/>
+          </a:p>
         </p:txBody>
       </p:sp>
       <p:sp>
         <p:nvSpPr>
           <p:cNvPr id="47" name="Google Shape;47;p7"/>
-          <p:cNvSpPr txBox="1"/>
+          <p:cNvSpPr txBox="1">
+            <a:spLocks noGrp="1"/>
+          </p:cNvSpPr>
           <p:nvPr>
             <p:ph type="ftr" idx="11"/>
           </p:nvPr>
@@ -7032,13 +7201,17 @@
               <a:defRPr/>
             </a:lvl9pPr>
           </a:lstStyle>
-          <a:p/>
+          <a:p>
+            <a:endParaRPr/>
+          </a:p>
         </p:txBody>
       </p:sp>
       <p:sp>
         <p:nvSpPr>
           <p:cNvPr id="48" name="Google Shape;48;p7"/>
-          <p:cNvSpPr txBox="1"/>
+          <p:cNvSpPr txBox="1">
+            <a:spLocks noGrp="1"/>
+          </p:cNvSpPr>
           <p:nvPr>
             <p:ph type="sldNum" idx="12"/>
           </p:nvPr>
@@ -7137,6 +7310,7 @@
             </a:pPr>
             <a:fld id="{00000000-1234-1234-1234-123412341234}" type="slidenum">
               <a:rPr lang="en-US"/>
+              <a:t>‹#›</a:t>
             </a:fld>
             <a:endParaRPr lang="en-US"/>
           </a:p>
@@ -7151,11 +7325,11 @@
 </file>
 
 <file path=ppt/slideLayouts/slideLayout7.xml><?xml version="1.0" encoding="utf-8"?>
-<p:sldLayout xmlns:a="http://schemas.openxmlformats.org/drawingml/2006/main" xmlns:r="http://schemas.openxmlformats.org/officeDocument/2006/relationships" xmlns:p="http://schemas.openxmlformats.org/presentationml/2006/main" type="titleOnly" matchingName="Title Only">
+<p:sldLayout xmlns:a="http://schemas.openxmlformats.org/drawingml/2006/main" xmlns:r="http://schemas.openxmlformats.org/officeDocument/2006/relationships" xmlns:p="http://schemas.openxmlformats.org/presentationml/2006/main" matchingName="Title Only" type="titleOnly">
   <p:cSld name="TITLE_ONLY">
     <p:spTree>
       <p:nvGrpSpPr>
-        <p:cNvPr id="49" name="Shape 49"/>
+        <p:cNvPr id="1" name="Shape 49"/>
         <p:cNvGrpSpPr/>
         <p:nvPr/>
       </p:nvGrpSpPr>
@@ -7170,7 +7344,9 @@
       <p:sp>
         <p:nvSpPr>
           <p:cNvPr id="50" name="Google Shape;50;p8"/>
-          <p:cNvSpPr txBox="1"/>
+          <p:cNvSpPr txBox="1">
+            <a:spLocks noGrp="1"/>
+          </p:cNvSpPr>
           <p:nvPr>
             <p:ph type="title"/>
           </p:nvPr>
@@ -7296,13 +7472,17 @@
               <a:defRPr/>
             </a:lvl9pPr>
           </a:lstStyle>
-          <a:p/>
+          <a:p>
+            <a:endParaRPr/>
+          </a:p>
         </p:txBody>
       </p:sp>
       <p:sp>
         <p:nvSpPr>
           <p:cNvPr id="51" name="Google Shape;51;p8"/>
-          <p:cNvSpPr txBox="1"/>
+          <p:cNvSpPr txBox="1">
+            <a:spLocks noGrp="1"/>
+          </p:cNvSpPr>
           <p:nvPr>
             <p:ph type="dt" idx="10"/>
           </p:nvPr>
@@ -7425,13 +7605,17 @@
               <a:defRPr/>
             </a:lvl9pPr>
           </a:lstStyle>
-          <a:p/>
+          <a:p>
+            <a:endParaRPr/>
+          </a:p>
         </p:txBody>
       </p:sp>
       <p:sp>
         <p:nvSpPr>
           <p:cNvPr id="52" name="Google Shape;52;p8"/>
-          <p:cNvSpPr txBox="1"/>
+          <p:cNvSpPr txBox="1">
+            <a:spLocks noGrp="1"/>
+          </p:cNvSpPr>
           <p:nvPr>
             <p:ph type="ftr" idx="11"/>
           </p:nvPr>
@@ -7554,13 +7738,17 @@
               <a:defRPr/>
             </a:lvl9pPr>
           </a:lstStyle>
-          <a:p/>
+          <a:p>
+            <a:endParaRPr/>
+          </a:p>
         </p:txBody>
       </p:sp>
       <p:sp>
         <p:nvSpPr>
           <p:cNvPr id="53" name="Google Shape;53;p8"/>
-          <p:cNvSpPr txBox="1"/>
+          <p:cNvSpPr txBox="1">
+            <a:spLocks noGrp="1"/>
+          </p:cNvSpPr>
           <p:nvPr>
             <p:ph type="sldNum" idx="12"/>
           </p:nvPr>
@@ -7659,6 +7847,7 @@
             </a:pPr>
             <a:fld id="{00000000-1234-1234-1234-123412341234}" type="slidenum">
               <a:rPr lang="en-US"/>
+              <a:t>‹#›</a:t>
             </a:fld>
             <a:endParaRPr lang="en-US"/>
           </a:p>
@@ -7673,11 +7862,11 @@
 </file>
 
 <file path=ppt/slideLayouts/slideLayout8.xml><?xml version="1.0" encoding="utf-8"?>
-<p:sldLayout xmlns:a="http://schemas.openxmlformats.org/drawingml/2006/main" xmlns:r="http://schemas.openxmlformats.org/officeDocument/2006/relationships" xmlns:p="http://schemas.openxmlformats.org/presentationml/2006/main" type="objTx" matchingName="Content with Caption">
+<p:sldLayout xmlns:a="http://schemas.openxmlformats.org/drawingml/2006/main" xmlns:r="http://schemas.openxmlformats.org/officeDocument/2006/relationships" xmlns:p="http://schemas.openxmlformats.org/presentationml/2006/main" matchingName="Content with Caption" type="objTx">
   <p:cSld name="OBJECT_WITH_CAPTION_TEXT">
     <p:spTree>
       <p:nvGrpSpPr>
-        <p:cNvPr id="54" name="Shape 54"/>
+        <p:cNvPr id="1" name="Shape 54"/>
         <p:cNvGrpSpPr/>
         <p:nvPr/>
       </p:nvGrpSpPr>
@@ -7692,7 +7881,9 @@
       <p:sp>
         <p:nvSpPr>
           <p:cNvPr id="55" name="Google Shape;55;p9"/>
-          <p:cNvSpPr txBox="1"/>
+          <p:cNvSpPr txBox="1">
+            <a:spLocks noGrp="1"/>
+          </p:cNvSpPr>
           <p:nvPr>
             <p:ph type="title"/>
           </p:nvPr>
@@ -7819,13 +8010,17 @@
               <a:defRPr/>
             </a:lvl9pPr>
           </a:lstStyle>
-          <a:p/>
+          <a:p>
+            <a:endParaRPr/>
+          </a:p>
         </p:txBody>
       </p:sp>
       <p:sp>
         <p:nvSpPr>
           <p:cNvPr id="56" name="Google Shape;56;p9"/>
-          <p:cNvSpPr txBox="1"/>
+          <p:cNvSpPr txBox="1">
+            <a:spLocks noGrp="1"/>
+          </p:cNvSpPr>
           <p:nvPr>
             <p:ph type="body" idx="1"/>
           </p:nvPr>
@@ -7975,13 +8170,17 @@
               <a:defRPr sz="2000"/>
             </a:lvl9pPr>
           </a:lstStyle>
-          <a:p/>
+          <a:p>
+            <a:endParaRPr/>
+          </a:p>
         </p:txBody>
       </p:sp>
       <p:sp>
         <p:nvSpPr>
           <p:cNvPr id="57" name="Google Shape;57;p9"/>
-          <p:cNvSpPr txBox="1"/>
+          <p:cNvSpPr txBox="1">
+            <a:spLocks noGrp="1"/>
+          </p:cNvSpPr>
           <p:nvPr>
             <p:ph type="body" idx="2"/>
           </p:nvPr>
@@ -8131,13 +8330,17 @@
               <a:defRPr sz="900"/>
             </a:lvl9pPr>
           </a:lstStyle>
-          <a:p/>
+          <a:p>
+            <a:endParaRPr/>
+          </a:p>
         </p:txBody>
       </p:sp>
       <p:sp>
         <p:nvSpPr>
           <p:cNvPr id="58" name="Google Shape;58;p9"/>
-          <p:cNvSpPr txBox="1"/>
+          <p:cNvSpPr txBox="1">
+            <a:spLocks noGrp="1"/>
+          </p:cNvSpPr>
           <p:nvPr>
             <p:ph type="dt" idx="10"/>
           </p:nvPr>
@@ -8260,13 +8463,17 @@
               <a:defRPr/>
             </a:lvl9pPr>
           </a:lstStyle>
-          <a:p/>
+          <a:p>
+            <a:endParaRPr/>
+          </a:p>
         </p:txBody>
       </p:sp>
       <p:sp>
         <p:nvSpPr>
           <p:cNvPr id="59" name="Google Shape;59;p9"/>
-          <p:cNvSpPr txBox="1"/>
+          <p:cNvSpPr txBox="1">
+            <a:spLocks noGrp="1"/>
+          </p:cNvSpPr>
           <p:nvPr>
             <p:ph type="ftr" idx="11"/>
           </p:nvPr>
@@ -8389,13 +8596,17 @@
               <a:defRPr/>
             </a:lvl9pPr>
           </a:lstStyle>
-          <a:p/>
+          <a:p>
+            <a:endParaRPr/>
+          </a:p>
         </p:txBody>
       </p:sp>
       <p:sp>
         <p:nvSpPr>
           <p:cNvPr id="60" name="Google Shape;60;p9"/>
-          <p:cNvSpPr txBox="1"/>
+          <p:cNvSpPr txBox="1">
+            <a:spLocks noGrp="1"/>
+          </p:cNvSpPr>
           <p:nvPr>
             <p:ph type="sldNum" idx="12"/>
           </p:nvPr>
@@ -8494,6 +8705,7 @@
             </a:pPr>
             <a:fld id="{00000000-1234-1234-1234-123412341234}" type="slidenum">
               <a:rPr lang="en-US"/>
+              <a:t>‹#›</a:t>
             </a:fld>
             <a:endParaRPr lang="en-US"/>
           </a:p>
@@ -8508,11 +8720,11 @@
 </file>
 
 <file path=ppt/slideLayouts/slideLayout9.xml><?xml version="1.0" encoding="utf-8"?>
-<p:sldLayout xmlns:a="http://schemas.openxmlformats.org/drawingml/2006/main" xmlns:r="http://schemas.openxmlformats.org/officeDocument/2006/relationships" xmlns:p="http://schemas.openxmlformats.org/presentationml/2006/main" type="picTx" matchingName="Picture with Caption">
+<p:sldLayout xmlns:a="http://schemas.openxmlformats.org/drawingml/2006/main" xmlns:r="http://schemas.openxmlformats.org/officeDocument/2006/relationships" xmlns:p="http://schemas.openxmlformats.org/presentationml/2006/main" matchingName="Picture with Caption" type="picTx">
   <p:cSld name="PICTURE_WITH_CAPTION_TEXT">
     <p:spTree>
       <p:nvGrpSpPr>
-        <p:cNvPr id="61" name="Shape 61"/>
+        <p:cNvPr id="1" name="Shape 61"/>
         <p:cNvGrpSpPr/>
         <p:nvPr/>
       </p:nvGrpSpPr>
@@ -8527,7 +8739,9 @@
       <p:sp>
         <p:nvSpPr>
           <p:cNvPr id="62" name="Google Shape;62;p10"/>
-          <p:cNvSpPr txBox="1"/>
+          <p:cNvSpPr txBox="1">
+            <a:spLocks noGrp="1"/>
+          </p:cNvSpPr>
           <p:nvPr>
             <p:ph type="title"/>
           </p:nvPr>
@@ -8654,13 +8868,17 @@
               <a:defRPr/>
             </a:lvl9pPr>
           </a:lstStyle>
-          <a:p/>
+          <a:p>
+            <a:endParaRPr/>
+          </a:p>
         </p:txBody>
       </p:sp>
       <p:sp>
         <p:nvSpPr>
           <p:cNvPr id="63" name="Google Shape;63;p10"/>
-          <p:cNvSpPr/>
+          <p:cNvSpPr>
+            <a:spLocks noGrp="1"/>
+          </p:cNvSpPr>
           <p:nvPr>
             <p:ph type="pic" idx="2"/>
           </p:nvPr>
@@ -8682,7 +8900,9 @@
       <p:sp>
         <p:nvSpPr>
           <p:cNvPr id="64" name="Google Shape;64;p10"/>
-          <p:cNvSpPr txBox="1"/>
+          <p:cNvSpPr txBox="1">
+            <a:spLocks noGrp="1"/>
+          </p:cNvSpPr>
           <p:nvPr>
             <p:ph type="body" idx="1"/>
           </p:nvPr>
@@ -8832,13 +9052,17 @@
               <a:defRPr sz="900"/>
             </a:lvl9pPr>
           </a:lstStyle>
-          <a:p/>
+          <a:p>
+            <a:endParaRPr/>
+          </a:p>
         </p:txBody>
       </p:sp>
       <p:sp>
         <p:nvSpPr>
           <p:cNvPr id="65" name="Google Shape;65;p10"/>
-          <p:cNvSpPr txBox="1"/>
+          <p:cNvSpPr txBox="1">
+            <a:spLocks noGrp="1"/>
+          </p:cNvSpPr>
           <p:nvPr>
             <p:ph type="dt" idx="10"/>
           </p:nvPr>
@@ -8961,13 +9185,17 @@
               <a:defRPr/>
             </a:lvl9pPr>
           </a:lstStyle>
-          <a:p/>
+          <a:p>
+            <a:endParaRPr/>
+          </a:p>
         </p:txBody>
       </p:sp>
       <p:sp>
         <p:nvSpPr>
           <p:cNvPr id="66" name="Google Shape;66;p10"/>
-          <p:cNvSpPr txBox="1"/>
+          <p:cNvSpPr txBox="1">
+            <a:spLocks noGrp="1"/>
+          </p:cNvSpPr>
           <p:nvPr>
             <p:ph type="ftr" idx="11"/>
           </p:nvPr>
@@ -9090,13 +9318,17 @@
               <a:defRPr/>
             </a:lvl9pPr>
           </a:lstStyle>
-          <a:p/>
+          <a:p>
+            <a:endParaRPr/>
+          </a:p>
         </p:txBody>
       </p:sp>
       <p:sp>
         <p:nvSpPr>
           <p:cNvPr id="67" name="Google Shape;67;p10"/>
-          <p:cNvSpPr txBox="1"/>
+          <p:cNvSpPr txBox="1">
+            <a:spLocks noGrp="1"/>
+          </p:cNvSpPr>
           <p:nvPr>
             <p:ph type="sldNum" idx="12"/>
           </p:nvPr>
@@ -9195,6 +9427,7 @@
             </a:pPr>
             <a:fld id="{00000000-1234-1234-1234-123412341234}" type="slidenum">
               <a:rPr lang="en-US"/>
+              <a:t>‹#›</a:t>
             </a:fld>
             <a:endParaRPr lang="en-US"/>
           </a:p>
@@ -9221,7 +9454,7 @@
     </p:bg>
     <p:spTree>
       <p:nvGrpSpPr>
-        <p:cNvPr id="5" name="Shape 5"/>
+        <p:cNvPr id="1" name="Shape 5"/>
         <p:cNvGrpSpPr/>
         <p:nvPr/>
       </p:nvGrpSpPr>
@@ -9236,7 +9469,9 @@
       <p:sp>
         <p:nvSpPr>
           <p:cNvPr id="6" name="Google Shape;6;p1"/>
-          <p:cNvSpPr txBox="1"/>
+          <p:cNvSpPr txBox="1">
+            <a:spLocks noGrp="1"/>
+          </p:cNvSpPr>
           <p:nvPr>
             <p:ph type="title"/>
           </p:nvPr>
@@ -9371,13 +9606,17 @@
               <a:defRPr sz="1800"/>
             </a:lvl9pPr>
           </a:lstStyle>
-          <a:p/>
+          <a:p>
+            <a:endParaRPr/>
+          </a:p>
         </p:txBody>
       </p:sp>
       <p:sp>
         <p:nvSpPr>
           <p:cNvPr id="7" name="Google Shape;7;p1"/>
-          <p:cNvSpPr txBox="1"/>
+          <p:cNvSpPr txBox="1">
+            <a:spLocks noGrp="1"/>
+          </p:cNvSpPr>
           <p:nvPr>
             <p:ph type="body" idx="1"/>
           </p:nvPr>
@@ -9608,13 +9847,17 @@
               </a:defRPr>
             </a:lvl9pPr>
           </a:lstStyle>
-          <a:p/>
+          <a:p>
+            <a:endParaRPr/>
+          </a:p>
         </p:txBody>
       </p:sp>
       <p:sp>
         <p:nvSpPr>
           <p:cNvPr id="8" name="Google Shape;8;p1"/>
-          <p:cNvSpPr txBox="1"/>
+          <p:cNvSpPr txBox="1">
+            <a:spLocks noGrp="1"/>
+          </p:cNvSpPr>
           <p:nvPr>
             <p:ph type="dt" idx="10"/>
           </p:nvPr>
@@ -9809,13 +10052,17 @@
               </a:defRPr>
             </a:lvl9pPr>
           </a:lstStyle>
-          <a:p/>
+          <a:p>
+            <a:endParaRPr/>
+          </a:p>
         </p:txBody>
       </p:sp>
       <p:sp>
         <p:nvSpPr>
           <p:cNvPr id="9" name="Google Shape;9;p1"/>
-          <p:cNvSpPr txBox="1"/>
+          <p:cNvSpPr txBox="1">
+            <a:spLocks noGrp="1"/>
+          </p:cNvSpPr>
           <p:nvPr>
             <p:ph type="ftr" idx="11"/>
           </p:nvPr>
@@ -10010,13 +10257,17 @@
               </a:defRPr>
             </a:lvl9pPr>
           </a:lstStyle>
-          <a:p/>
+          <a:p>
+            <a:endParaRPr/>
+          </a:p>
         </p:txBody>
       </p:sp>
       <p:sp>
         <p:nvSpPr>
           <p:cNvPr id="10" name="Google Shape;10;p1"/>
-          <p:cNvSpPr txBox="1"/>
+          <p:cNvSpPr txBox="1">
+            <a:spLocks noGrp="1"/>
+          </p:cNvSpPr>
           <p:nvPr>
             <p:ph type="sldNum" idx="12"/>
           </p:nvPr>
@@ -10187,6 +10438,7 @@
             </a:pPr>
             <a:fld id="{00000000-1234-1234-1234-123412341234}" type="slidenum">
               <a:rPr lang="en-US"/>
+              <a:t>‹#›</a:t>
             </a:fld>
             <a:endParaRPr lang="en-US"/>
           </a:p>
@@ -10914,7 +11166,7 @@
     </p:bg>
     <p:spTree>
       <p:nvGrpSpPr>
-        <p:cNvPr id="83" name="Shape 83"/>
+        <p:cNvPr id="1" name="Shape 83"/>
         <p:cNvGrpSpPr/>
         <p:nvPr/>
       </p:nvGrpSpPr>
@@ -10933,7 +11185,7 @@
           <p:nvPr/>
         </p:nvPicPr>
         <p:blipFill rotWithShape="1">
-          <a:blip r:embed="rId1"/>
+          <a:blip r:embed="rId3"/>
           <a:srcRect/>
           <a:stretch>
             <a:fillRect/>
@@ -11025,15 +11277,6 @@
               </a:rPr>
               <a:t> коммерческом банке</a:t>
             </a:r>
-            <a:endParaRPr lang="en-US" sz="4800" b="1" i="0" u="none" strike="noStrike" cap="none">
-              <a:solidFill>
-                <a:srgbClr val="005088"/>
-              </a:solidFill>
-              <a:latin typeface="Times New Roman" panose="02020603050405020304" charset="0"/>
-              <a:ea typeface="Montserrat"/>
-              <a:cs typeface="Times New Roman" panose="02020603050405020304" charset="0"/>
-              <a:sym typeface="Montserrat"/>
-            </a:endParaRPr>
           </a:p>
         </p:txBody>
       </p:sp>
@@ -11109,15 +11352,6 @@
               </a:rPr>
               <a:t> для автоматизации кредитных операций</a:t>
             </a:r>
-            <a:endParaRPr lang="en-US" sz="2100" b="0" i="0" u="none" strike="noStrike" cap="none">
-              <a:solidFill>
-                <a:srgbClr val="64748B"/>
-              </a:solidFill>
-              <a:latin typeface="Times New Roman" panose="02020603050405020304" charset="0"/>
-              <a:ea typeface="Open Sans"/>
-              <a:cs typeface="Times New Roman" panose="02020603050405020304" charset="0"/>
-              <a:sym typeface="Open Sans"/>
-            </a:endParaRPr>
           </a:p>
         </p:txBody>
       </p:sp>
@@ -11169,6 +11403,690 @@
           </a:p>
         </p:txBody>
       </p:sp>
+      <p:sp>
+        <p:nvSpPr>
+          <p:cNvPr id="2" name="Подзаголовок 2">
+            <a:extLst>
+              <a:ext uri="{FF2B5EF4-FFF2-40B4-BE49-F238E27FC236}">
+                <a16:creationId xmlns:a16="http://schemas.microsoft.com/office/drawing/2014/main" id="{0782379C-65B7-ED30-CEA7-665759D70C1E}"/>
+              </a:ext>
+            </a:extLst>
+          </p:cNvPr>
+          <p:cNvSpPr txBox="1">
+            <a:spLocks/>
+          </p:cNvSpPr>
+          <p:nvPr/>
+        </p:nvSpPr>
+        <p:spPr>
+          <a:xfrm>
+            <a:off x="2212531" y="5144907"/>
+            <a:ext cx="7766936" cy="1096899"/>
+          </a:xfrm>
+          <a:prstGeom prst="rect">
+            <a:avLst/>
+          </a:prstGeom>
+        </p:spPr>
+        <p:txBody>
+          <a:bodyPr>
+            <a:normAutofit/>
+          </a:bodyPr>
+          <a:lstStyle>
+            <a:defPPr marR="0" lvl="0" algn="l" rtl="0">
+              <a:lnSpc>
+                <a:spcPct val="100000"/>
+              </a:lnSpc>
+              <a:spcBef>
+                <a:spcPts val="0"/>
+              </a:spcBef>
+              <a:spcAft>
+                <a:spcPts val="0"/>
+              </a:spcAft>
+            </a:defPPr>
+            <a:lvl1pPr marR="0" lvl="0" algn="l" rtl="0">
+              <a:lnSpc>
+                <a:spcPct val="100000"/>
+              </a:lnSpc>
+              <a:spcBef>
+                <a:spcPts val="0"/>
+              </a:spcBef>
+              <a:spcAft>
+                <a:spcPts val="0"/>
+              </a:spcAft>
+              <a:buClr>
+                <a:srgbClr val="000000"/>
+              </a:buClr>
+              <a:buFont typeface="Arial" panose="020B0604020202020204"/>
+              <a:defRPr sz="1400" b="0" i="0" u="none" strike="noStrike" cap="none">
+                <a:solidFill>
+                  <a:srgbClr val="000000"/>
+                </a:solidFill>
+                <a:latin typeface="Arial" panose="020B0604020202020204"/>
+                <a:ea typeface="Arial" panose="020B0604020202020204"/>
+                <a:cs typeface="Arial" panose="020B0604020202020204"/>
+                <a:sym typeface="Arial" panose="020B0604020202020204"/>
+              </a:defRPr>
+            </a:lvl1pPr>
+            <a:lvl2pPr marR="0" lvl="1" algn="l" rtl="0">
+              <a:lnSpc>
+                <a:spcPct val="100000"/>
+              </a:lnSpc>
+              <a:spcBef>
+                <a:spcPts val="0"/>
+              </a:spcBef>
+              <a:spcAft>
+                <a:spcPts val="0"/>
+              </a:spcAft>
+              <a:buClr>
+                <a:srgbClr val="000000"/>
+              </a:buClr>
+              <a:buFont typeface="Arial" panose="020B0604020202020204"/>
+              <a:defRPr sz="1400" b="0" i="0" u="none" strike="noStrike" cap="none">
+                <a:solidFill>
+                  <a:srgbClr val="000000"/>
+                </a:solidFill>
+                <a:latin typeface="Arial" panose="020B0604020202020204"/>
+                <a:ea typeface="Arial" panose="020B0604020202020204"/>
+                <a:cs typeface="Arial" panose="020B0604020202020204"/>
+                <a:sym typeface="Arial" panose="020B0604020202020204"/>
+              </a:defRPr>
+            </a:lvl2pPr>
+            <a:lvl3pPr marR="0" lvl="2" algn="l" rtl="0">
+              <a:lnSpc>
+                <a:spcPct val="100000"/>
+              </a:lnSpc>
+              <a:spcBef>
+                <a:spcPts val="0"/>
+              </a:spcBef>
+              <a:spcAft>
+                <a:spcPts val="0"/>
+              </a:spcAft>
+              <a:buClr>
+                <a:srgbClr val="000000"/>
+              </a:buClr>
+              <a:buFont typeface="Arial" panose="020B0604020202020204"/>
+              <a:defRPr sz="1400" b="0" i="0" u="none" strike="noStrike" cap="none">
+                <a:solidFill>
+                  <a:srgbClr val="000000"/>
+                </a:solidFill>
+                <a:latin typeface="Arial" panose="020B0604020202020204"/>
+                <a:ea typeface="Arial" panose="020B0604020202020204"/>
+                <a:cs typeface="Arial" panose="020B0604020202020204"/>
+                <a:sym typeface="Arial" panose="020B0604020202020204"/>
+              </a:defRPr>
+            </a:lvl3pPr>
+            <a:lvl4pPr marR="0" lvl="3" algn="l" rtl="0">
+              <a:lnSpc>
+                <a:spcPct val="100000"/>
+              </a:lnSpc>
+              <a:spcBef>
+                <a:spcPts val="0"/>
+              </a:spcBef>
+              <a:spcAft>
+                <a:spcPts val="0"/>
+              </a:spcAft>
+              <a:buClr>
+                <a:srgbClr val="000000"/>
+              </a:buClr>
+              <a:buFont typeface="Arial" panose="020B0604020202020204"/>
+              <a:defRPr sz="1400" b="0" i="0" u="none" strike="noStrike" cap="none">
+                <a:solidFill>
+                  <a:srgbClr val="000000"/>
+                </a:solidFill>
+                <a:latin typeface="Arial" panose="020B0604020202020204"/>
+                <a:ea typeface="Arial" panose="020B0604020202020204"/>
+                <a:cs typeface="Arial" panose="020B0604020202020204"/>
+                <a:sym typeface="Arial" panose="020B0604020202020204"/>
+              </a:defRPr>
+            </a:lvl4pPr>
+            <a:lvl5pPr marR="0" lvl="4" algn="l" rtl="0">
+              <a:lnSpc>
+                <a:spcPct val="100000"/>
+              </a:lnSpc>
+              <a:spcBef>
+                <a:spcPts val="0"/>
+              </a:spcBef>
+              <a:spcAft>
+                <a:spcPts val="0"/>
+              </a:spcAft>
+              <a:buClr>
+                <a:srgbClr val="000000"/>
+              </a:buClr>
+              <a:buFont typeface="Arial" panose="020B0604020202020204"/>
+              <a:defRPr sz="1400" b="0" i="0" u="none" strike="noStrike" cap="none">
+                <a:solidFill>
+                  <a:srgbClr val="000000"/>
+                </a:solidFill>
+                <a:latin typeface="Arial" panose="020B0604020202020204"/>
+                <a:ea typeface="Arial" panose="020B0604020202020204"/>
+                <a:cs typeface="Arial" panose="020B0604020202020204"/>
+                <a:sym typeface="Arial" panose="020B0604020202020204"/>
+              </a:defRPr>
+            </a:lvl5pPr>
+            <a:lvl6pPr marR="0" lvl="5" algn="l" rtl="0">
+              <a:lnSpc>
+                <a:spcPct val="100000"/>
+              </a:lnSpc>
+              <a:spcBef>
+                <a:spcPts val="0"/>
+              </a:spcBef>
+              <a:spcAft>
+                <a:spcPts val="0"/>
+              </a:spcAft>
+              <a:buClr>
+                <a:srgbClr val="000000"/>
+              </a:buClr>
+              <a:buFont typeface="Arial" panose="020B0604020202020204"/>
+              <a:defRPr sz="1400" b="0" i="0" u="none" strike="noStrike" cap="none">
+                <a:solidFill>
+                  <a:srgbClr val="000000"/>
+                </a:solidFill>
+                <a:latin typeface="Arial" panose="020B0604020202020204"/>
+                <a:ea typeface="Arial" panose="020B0604020202020204"/>
+                <a:cs typeface="Arial" panose="020B0604020202020204"/>
+                <a:sym typeface="Arial" panose="020B0604020202020204"/>
+              </a:defRPr>
+            </a:lvl6pPr>
+            <a:lvl7pPr marR="0" lvl="6" algn="l" rtl="0">
+              <a:lnSpc>
+                <a:spcPct val="100000"/>
+              </a:lnSpc>
+              <a:spcBef>
+                <a:spcPts val="0"/>
+              </a:spcBef>
+              <a:spcAft>
+                <a:spcPts val="0"/>
+              </a:spcAft>
+              <a:buClr>
+                <a:srgbClr val="000000"/>
+              </a:buClr>
+              <a:buFont typeface="Arial" panose="020B0604020202020204"/>
+              <a:defRPr sz="1400" b="0" i="0" u="none" strike="noStrike" cap="none">
+                <a:solidFill>
+                  <a:srgbClr val="000000"/>
+                </a:solidFill>
+                <a:latin typeface="Arial" panose="020B0604020202020204"/>
+                <a:ea typeface="Arial" panose="020B0604020202020204"/>
+                <a:cs typeface="Arial" panose="020B0604020202020204"/>
+                <a:sym typeface="Arial" panose="020B0604020202020204"/>
+              </a:defRPr>
+            </a:lvl7pPr>
+            <a:lvl8pPr marR="0" lvl="7" algn="l" rtl="0">
+              <a:lnSpc>
+                <a:spcPct val="100000"/>
+              </a:lnSpc>
+              <a:spcBef>
+                <a:spcPts val="0"/>
+              </a:spcBef>
+              <a:spcAft>
+                <a:spcPts val="0"/>
+              </a:spcAft>
+              <a:buClr>
+                <a:srgbClr val="000000"/>
+              </a:buClr>
+              <a:buFont typeface="Arial" panose="020B0604020202020204"/>
+              <a:defRPr sz="1400" b="0" i="0" u="none" strike="noStrike" cap="none">
+                <a:solidFill>
+                  <a:srgbClr val="000000"/>
+                </a:solidFill>
+                <a:latin typeface="Arial" panose="020B0604020202020204"/>
+                <a:ea typeface="Arial" panose="020B0604020202020204"/>
+                <a:cs typeface="Arial" panose="020B0604020202020204"/>
+                <a:sym typeface="Arial" panose="020B0604020202020204"/>
+              </a:defRPr>
+            </a:lvl8pPr>
+            <a:lvl9pPr marR="0" lvl="8" algn="l" rtl="0">
+              <a:lnSpc>
+                <a:spcPct val="100000"/>
+              </a:lnSpc>
+              <a:spcBef>
+                <a:spcPts val="0"/>
+              </a:spcBef>
+              <a:spcAft>
+                <a:spcPts val="0"/>
+              </a:spcAft>
+              <a:buClr>
+                <a:srgbClr val="000000"/>
+              </a:buClr>
+              <a:buFont typeface="Arial" panose="020B0604020202020204"/>
+              <a:defRPr sz="1400" b="0" i="0" u="none" strike="noStrike" cap="none">
+                <a:solidFill>
+                  <a:srgbClr val="000000"/>
+                </a:solidFill>
+                <a:latin typeface="Arial" panose="020B0604020202020204"/>
+                <a:ea typeface="Arial" panose="020B0604020202020204"/>
+                <a:cs typeface="Arial" panose="020B0604020202020204"/>
+                <a:sym typeface="Arial" panose="020B0604020202020204"/>
+              </a:defRPr>
+            </a:lvl9pPr>
+          </a:lstStyle>
+          <a:p>
+            <a:pPr algn="ctr"/>
+            <a:r>
+              <a:rPr lang="ru-RU" dirty="0">
+                <a:solidFill>
+                  <a:srgbClr val="64748B"/>
+                </a:solidFill>
+                <a:latin typeface="Times New Roman" panose="02020603050405020304" pitchFamily="18" charset="0"/>
+                <a:cs typeface="Times New Roman" panose="02020603050405020304" pitchFamily="18" charset="0"/>
+              </a:rPr>
+              <a:t>Курсовой проект по дисциплине «Разработка программных модулей»</a:t>
+            </a:r>
+          </a:p>
+          <a:p>
+            <a:pPr algn="ctr"/>
+            <a:endParaRPr lang="ru-RU" dirty="0">
+              <a:solidFill>
+                <a:srgbClr val="64748B"/>
+              </a:solidFill>
+              <a:latin typeface="Times New Roman" panose="02020603050405020304" pitchFamily="18" charset="0"/>
+              <a:cs typeface="Times New Roman" panose="02020603050405020304" pitchFamily="18" charset="0"/>
+            </a:endParaRPr>
+          </a:p>
+          <a:p>
+            <a:pPr algn="ctr"/>
+            <a:r>
+              <a:rPr lang="ru-RU" dirty="0">
+                <a:solidFill>
+                  <a:srgbClr val="64748B"/>
+                </a:solidFill>
+                <a:latin typeface="Times New Roman" panose="02020603050405020304" pitchFamily="18" charset="0"/>
+                <a:cs typeface="Times New Roman" panose="02020603050405020304" pitchFamily="18" charset="0"/>
+              </a:rPr>
+              <a:t>Выполнил: студент группы ИП -31, ФИО</a:t>
+            </a:r>
+          </a:p>
+          <a:p>
+            <a:pPr algn="ctr"/>
+            <a:r>
+              <a:rPr lang="ru-RU" dirty="0">
+                <a:solidFill>
+                  <a:srgbClr val="64748B"/>
+                </a:solidFill>
+                <a:latin typeface="Times New Roman" panose="02020603050405020304" pitchFamily="18" charset="0"/>
+                <a:cs typeface="Times New Roman" panose="02020603050405020304" pitchFamily="18" charset="0"/>
+              </a:rPr>
+              <a:t>Проверил: Назарова И.А</a:t>
+            </a:r>
+          </a:p>
+        </p:txBody>
+      </p:sp>
+      <p:sp>
+        <p:nvSpPr>
+          <p:cNvPr id="3" name="TextBox 2">
+            <a:extLst>
+              <a:ext uri="{FF2B5EF4-FFF2-40B4-BE49-F238E27FC236}">
+                <a16:creationId xmlns:a16="http://schemas.microsoft.com/office/drawing/2014/main" id="{4C0E359B-F4A8-D742-F82B-B8F655F27A0F}"/>
+              </a:ext>
+            </a:extLst>
+          </p:cNvPr>
+          <p:cNvSpPr txBox="1"/>
+          <p:nvPr/>
+        </p:nvSpPr>
+        <p:spPr>
+          <a:xfrm>
+            <a:off x="0" y="104064"/>
+            <a:ext cx="12191999" cy="1027269"/>
+          </a:xfrm>
+          <a:prstGeom prst="rect">
+            <a:avLst/>
+          </a:prstGeom>
+          <a:noFill/>
+        </p:spPr>
+        <p:txBody>
+          <a:bodyPr wrap="square">
+            <a:spAutoFit/>
+          </a:bodyPr>
+          <a:lstStyle/>
+          <a:p>
+            <a:pPr algn="ctr">
+              <a:lnSpc>
+                <a:spcPct val="150000"/>
+              </a:lnSpc>
+              <a:buNone/>
+            </a:pPr>
+            <a:r>
+              <a:rPr lang="ru-RU" sz="1400" cap="all" dirty="0">
+                <a:solidFill>
+                  <a:srgbClr val="64748B"/>
+                </a:solidFill>
+                <a:effectLst/>
+                <a:latin typeface="Times New Roman" panose="02020603050405020304" pitchFamily="18" charset="0"/>
+                <a:ea typeface="Times New Roman" panose="02020603050405020304" pitchFamily="18" charset="0"/>
+                <a:cs typeface="Times New Roman" panose="02020603050405020304" pitchFamily="18" charset="0"/>
+              </a:rPr>
+              <a:t>МИНИСТЕРСТВО ОБРАЗОВАНИЯ САРАТОВСКОЙ ОБЛАСТИ ГОСУДАРСТВЕННОЕ АВТОНОМНОЕ ПРФЕССИОНАЛЬНОЕ</a:t>
+            </a:r>
+            <a:endParaRPr lang="ru-RU" sz="1100" dirty="0">
+              <a:solidFill>
+                <a:srgbClr val="64748B"/>
+              </a:solidFill>
+              <a:effectLst/>
+              <a:latin typeface="Times New Roman" panose="02020603050405020304" pitchFamily="18" charset="0"/>
+              <a:ea typeface="Calibri" panose="020F0502020204030204" pitchFamily="34" charset="0"/>
+              <a:cs typeface="Times New Roman" panose="02020603050405020304" pitchFamily="18" charset="0"/>
+            </a:endParaRPr>
+          </a:p>
+          <a:p>
+            <a:pPr algn="ctr">
+              <a:lnSpc>
+                <a:spcPct val="150000"/>
+              </a:lnSpc>
+              <a:buNone/>
+            </a:pPr>
+            <a:r>
+              <a:rPr lang="ru-RU" sz="1400" cap="all" dirty="0">
+                <a:solidFill>
+                  <a:srgbClr val="64748B"/>
+                </a:solidFill>
+                <a:effectLst/>
+                <a:latin typeface="Times New Roman" panose="02020603050405020304" pitchFamily="18" charset="0"/>
+                <a:ea typeface="Times New Roman" panose="02020603050405020304" pitchFamily="18" charset="0"/>
+                <a:cs typeface="Times New Roman" panose="02020603050405020304" pitchFamily="18" charset="0"/>
+              </a:rPr>
+              <a:t>ОБРАЗОВАТЕЛЬНОЕ УЧРЕЖДЕНИЕ САРАТОВСКОЙ ОБЛАСТИ</a:t>
+            </a:r>
+            <a:endParaRPr lang="ru-RU" sz="1100" dirty="0">
+              <a:solidFill>
+                <a:srgbClr val="64748B"/>
+              </a:solidFill>
+              <a:effectLst/>
+              <a:latin typeface="Times New Roman" panose="02020603050405020304" pitchFamily="18" charset="0"/>
+              <a:ea typeface="Calibri" panose="020F0502020204030204" pitchFamily="34" charset="0"/>
+              <a:cs typeface="Times New Roman" panose="02020603050405020304" pitchFamily="18" charset="0"/>
+            </a:endParaRPr>
+          </a:p>
+          <a:p>
+            <a:pPr algn="ctr">
+              <a:lnSpc>
+                <a:spcPct val="150000"/>
+              </a:lnSpc>
+              <a:buNone/>
+            </a:pPr>
+            <a:r>
+              <a:rPr lang="ru-RU" sz="1400" cap="all" dirty="0">
+                <a:solidFill>
+                  <a:srgbClr val="64748B"/>
+                </a:solidFill>
+                <a:effectLst/>
+                <a:latin typeface="Times New Roman" panose="02020603050405020304" pitchFamily="18" charset="0"/>
+                <a:ea typeface="Times New Roman" panose="02020603050405020304" pitchFamily="18" charset="0"/>
+                <a:cs typeface="Times New Roman" panose="02020603050405020304" pitchFamily="18" charset="0"/>
+              </a:rPr>
+              <a:t>«БАЛАШОВСКИЙ ТЕХНИКУМ МЕХАНИЗАЦИИ СЕЛЬСКОГО ХОЗЯЙСТВА»</a:t>
+            </a:r>
+            <a:endParaRPr lang="ru-RU" sz="1100" dirty="0">
+              <a:solidFill>
+                <a:srgbClr val="64748B"/>
+              </a:solidFill>
+              <a:effectLst/>
+              <a:latin typeface="Times New Roman" panose="02020603050405020304" pitchFamily="18" charset="0"/>
+              <a:ea typeface="Calibri" panose="020F0502020204030204" pitchFamily="34" charset="0"/>
+              <a:cs typeface="Times New Roman" panose="02020603050405020304" pitchFamily="18" charset="0"/>
+            </a:endParaRPr>
+          </a:p>
+        </p:txBody>
+      </p:sp>
+      <p:sp>
+        <p:nvSpPr>
+          <p:cNvPr id="4" name="Подзаголовок 2">
+            <a:extLst>
+              <a:ext uri="{FF2B5EF4-FFF2-40B4-BE49-F238E27FC236}">
+                <a16:creationId xmlns:a16="http://schemas.microsoft.com/office/drawing/2014/main" id="{708A1977-F2EA-CC0B-C01E-20CC744CD224}"/>
+              </a:ext>
+            </a:extLst>
+          </p:cNvPr>
+          <p:cNvSpPr txBox="1">
+            <a:spLocks/>
+          </p:cNvSpPr>
+          <p:nvPr/>
+        </p:nvSpPr>
+        <p:spPr>
+          <a:xfrm>
+            <a:off x="2212531" y="6439519"/>
+            <a:ext cx="7766936" cy="1096899"/>
+          </a:xfrm>
+          <a:prstGeom prst="rect">
+            <a:avLst/>
+          </a:prstGeom>
+        </p:spPr>
+        <p:txBody>
+          <a:bodyPr vert="horz" lIns="91440" tIns="45720" rIns="91440" bIns="45720" rtlCol="0" anchor="t">
+            <a:normAutofit/>
+          </a:bodyPr>
+          <a:lstStyle>
+            <a:lvl1pPr marL="0" indent="0" algn="r" defTabSz="457200" rtl="0" eaLnBrk="1" latinLnBrk="0" hangingPunct="1">
+              <a:spcBef>
+                <a:spcPts val="1000"/>
+              </a:spcBef>
+              <a:spcAft>
+                <a:spcPts val="0"/>
+              </a:spcAft>
+              <a:buClr>
+                <a:schemeClr val="accent1"/>
+              </a:buClr>
+              <a:buSzPct val="80000"/>
+              <a:buFont typeface="Wingdings 3" charset="2"/>
+              <a:buNone/>
+              <a:defRPr sz="1800" kern="1200">
+                <a:solidFill>
+                  <a:schemeClr val="tx1">
+                    <a:lumMod val="50000"/>
+                    <a:lumOff val="50000"/>
+                  </a:schemeClr>
+                </a:solidFill>
+                <a:latin typeface="+mn-lt"/>
+                <a:ea typeface="+mn-ea"/>
+                <a:cs typeface="+mn-cs"/>
+              </a:defRPr>
+            </a:lvl1pPr>
+            <a:lvl2pPr marL="457200" indent="0" algn="ctr" defTabSz="457200" rtl="0" eaLnBrk="1" latinLnBrk="0" hangingPunct="1">
+              <a:spcBef>
+                <a:spcPts val="1000"/>
+              </a:spcBef>
+              <a:spcAft>
+                <a:spcPts val="0"/>
+              </a:spcAft>
+              <a:buClr>
+                <a:schemeClr val="accent1"/>
+              </a:buClr>
+              <a:buSzPct val="80000"/>
+              <a:buFont typeface="Wingdings 3" charset="2"/>
+              <a:buNone/>
+              <a:defRPr sz="1600" kern="1200">
+                <a:solidFill>
+                  <a:schemeClr val="tx1">
+                    <a:tint val="75000"/>
+                  </a:schemeClr>
+                </a:solidFill>
+                <a:latin typeface="+mn-lt"/>
+                <a:ea typeface="+mn-ea"/>
+                <a:cs typeface="+mn-cs"/>
+              </a:defRPr>
+            </a:lvl2pPr>
+            <a:lvl3pPr marL="914400" indent="0" algn="ctr" defTabSz="457200" rtl="0" eaLnBrk="1" latinLnBrk="0" hangingPunct="1">
+              <a:spcBef>
+                <a:spcPts val="1000"/>
+              </a:spcBef>
+              <a:spcAft>
+                <a:spcPts val="0"/>
+              </a:spcAft>
+              <a:buClr>
+                <a:schemeClr val="accent1"/>
+              </a:buClr>
+              <a:buSzPct val="80000"/>
+              <a:buFont typeface="Wingdings 3" charset="2"/>
+              <a:buNone/>
+              <a:defRPr sz="1400" kern="1200">
+                <a:solidFill>
+                  <a:schemeClr val="tx1">
+                    <a:tint val="75000"/>
+                  </a:schemeClr>
+                </a:solidFill>
+                <a:latin typeface="+mn-lt"/>
+                <a:ea typeface="+mn-ea"/>
+                <a:cs typeface="+mn-cs"/>
+              </a:defRPr>
+            </a:lvl3pPr>
+            <a:lvl4pPr marL="1371600" indent="0" algn="ctr" defTabSz="457200" rtl="0" eaLnBrk="1" latinLnBrk="0" hangingPunct="1">
+              <a:spcBef>
+                <a:spcPts val="1000"/>
+              </a:spcBef>
+              <a:spcAft>
+                <a:spcPts val="0"/>
+              </a:spcAft>
+              <a:buClr>
+                <a:schemeClr val="accent1"/>
+              </a:buClr>
+              <a:buSzPct val="80000"/>
+              <a:buFont typeface="Wingdings 3" charset="2"/>
+              <a:buNone/>
+              <a:defRPr sz="1200" kern="1200">
+                <a:solidFill>
+                  <a:schemeClr val="tx1">
+                    <a:tint val="75000"/>
+                  </a:schemeClr>
+                </a:solidFill>
+                <a:latin typeface="+mn-lt"/>
+                <a:ea typeface="+mn-ea"/>
+                <a:cs typeface="+mn-cs"/>
+              </a:defRPr>
+            </a:lvl4pPr>
+            <a:lvl5pPr marL="1828800" indent="0" algn="ctr" defTabSz="457200" rtl="0" eaLnBrk="1" latinLnBrk="0" hangingPunct="1">
+              <a:spcBef>
+                <a:spcPts val="1000"/>
+              </a:spcBef>
+              <a:spcAft>
+                <a:spcPts val="0"/>
+              </a:spcAft>
+              <a:buClr>
+                <a:schemeClr val="accent1"/>
+              </a:buClr>
+              <a:buSzPct val="80000"/>
+              <a:buFont typeface="Wingdings 3" charset="2"/>
+              <a:buNone/>
+              <a:defRPr sz="1200" kern="1200">
+                <a:solidFill>
+                  <a:schemeClr val="tx1">
+                    <a:tint val="75000"/>
+                  </a:schemeClr>
+                </a:solidFill>
+                <a:latin typeface="+mn-lt"/>
+                <a:ea typeface="+mn-ea"/>
+                <a:cs typeface="+mn-cs"/>
+              </a:defRPr>
+            </a:lvl5pPr>
+            <a:lvl6pPr marL="2286000" indent="0" algn="ctr" defTabSz="457200" rtl="0" eaLnBrk="1" latinLnBrk="0" hangingPunct="1">
+              <a:spcBef>
+                <a:spcPts val="1000"/>
+              </a:spcBef>
+              <a:spcAft>
+                <a:spcPts val="0"/>
+              </a:spcAft>
+              <a:buClr>
+                <a:schemeClr val="accent1"/>
+              </a:buClr>
+              <a:buSzPct val="80000"/>
+              <a:buFont typeface="Wingdings 3" charset="2"/>
+              <a:buNone/>
+              <a:defRPr sz="1200" kern="1200">
+                <a:solidFill>
+                  <a:schemeClr val="tx1">
+                    <a:tint val="75000"/>
+                  </a:schemeClr>
+                </a:solidFill>
+                <a:latin typeface="+mn-lt"/>
+                <a:ea typeface="+mn-ea"/>
+                <a:cs typeface="+mn-cs"/>
+              </a:defRPr>
+            </a:lvl6pPr>
+            <a:lvl7pPr marL="2743200" indent="0" algn="ctr" defTabSz="457200" rtl="0" eaLnBrk="1" latinLnBrk="0" hangingPunct="1">
+              <a:spcBef>
+                <a:spcPts val="1000"/>
+              </a:spcBef>
+              <a:spcAft>
+                <a:spcPts val="0"/>
+              </a:spcAft>
+              <a:buClr>
+                <a:schemeClr val="accent1"/>
+              </a:buClr>
+              <a:buSzPct val="80000"/>
+              <a:buFont typeface="Wingdings 3" charset="2"/>
+              <a:buNone/>
+              <a:defRPr sz="1200" kern="1200">
+                <a:solidFill>
+                  <a:schemeClr val="tx1">
+                    <a:tint val="75000"/>
+                  </a:schemeClr>
+                </a:solidFill>
+                <a:latin typeface="+mn-lt"/>
+                <a:ea typeface="+mn-ea"/>
+                <a:cs typeface="+mn-cs"/>
+              </a:defRPr>
+            </a:lvl7pPr>
+            <a:lvl8pPr marL="3200400" indent="0" algn="ctr" defTabSz="457200" rtl="0" eaLnBrk="1" latinLnBrk="0" hangingPunct="1">
+              <a:spcBef>
+                <a:spcPts val="1000"/>
+              </a:spcBef>
+              <a:spcAft>
+                <a:spcPts val="0"/>
+              </a:spcAft>
+              <a:buClr>
+                <a:schemeClr val="accent1"/>
+              </a:buClr>
+              <a:buSzPct val="80000"/>
+              <a:buFont typeface="Wingdings 3" charset="2"/>
+              <a:buNone/>
+              <a:defRPr sz="1200" kern="1200">
+                <a:solidFill>
+                  <a:schemeClr val="tx1">
+                    <a:tint val="75000"/>
+                  </a:schemeClr>
+                </a:solidFill>
+                <a:latin typeface="+mn-lt"/>
+                <a:ea typeface="+mn-ea"/>
+                <a:cs typeface="+mn-cs"/>
+              </a:defRPr>
+            </a:lvl8pPr>
+            <a:lvl9pPr marL="3657600" indent="0" algn="ctr" defTabSz="457200" rtl="0" eaLnBrk="1" latinLnBrk="0" hangingPunct="1">
+              <a:spcBef>
+                <a:spcPts val="1000"/>
+              </a:spcBef>
+              <a:spcAft>
+                <a:spcPts val="0"/>
+              </a:spcAft>
+              <a:buClr>
+                <a:schemeClr val="accent1"/>
+              </a:buClr>
+              <a:buSzPct val="80000"/>
+              <a:buFont typeface="Wingdings 3" charset="2"/>
+              <a:buNone/>
+              <a:defRPr sz="1200" kern="1200">
+                <a:solidFill>
+                  <a:schemeClr val="tx1">
+                    <a:tint val="75000"/>
+                  </a:schemeClr>
+                </a:solidFill>
+                <a:latin typeface="+mn-lt"/>
+                <a:ea typeface="+mn-ea"/>
+                <a:cs typeface="+mn-cs"/>
+              </a:defRPr>
+            </a:lvl9pPr>
+          </a:lstStyle>
+          <a:p>
+            <a:pPr algn="ctr"/>
+            <a:r>
+              <a:rPr lang="ru-RU" sz="1200" dirty="0">
+                <a:solidFill>
+                  <a:srgbClr val="64748B"/>
+                </a:solidFill>
+                <a:latin typeface="Times New Roman" panose="02020603050405020304" pitchFamily="18" charset="0"/>
+                <a:cs typeface="Times New Roman" panose="02020603050405020304" pitchFamily="18" charset="0"/>
+              </a:rPr>
+              <a:t>Балашов 2026</a:t>
+            </a:r>
+          </a:p>
+        </p:txBody>
+      </p:sp>
     </p:spTree>
   </p:cSld>
   <p:clrMapOvr>
@@ -11190,7 +12108,7 @@
     </p:bg>
     <p:spTree>
       <p:nvGrpSpPr>
-        <p:cNvPr id="91" name="Shape 91"/>
+        <p:cNvPr id="1" name="Shape 91"/>
         <p:cNvGrpSpPr/>
         <p:nvPr/>
       </p:nvGrpSpPr>
@@ -11209,7 +12127,7 @@
           <p:nvPr/>
         </p:nvPicPr>
         <p:blipFill rotWithShape="1">
-          <a:blip r:embed="rId1"/>
+          <a:blip r:embed="rId3"/>
           <a:srcRect/>
           <a:stretch>
             <a:fillRect/>
@@ -11275,15 +12193,6 @@
               </a:rPr>
               <a:t>Цели и задачи проекта</a:t>
             </a:r>
-            <a:endParaRPr lang="en-US" sz="3000" b="1" i="0" u="none" strike="noStrike" cap="none">
-              <a:solidFill>
-                <a:srgbClr val="005088"/>
-              </a:solidFill>
-              <a:latin typeface="Times New Roman" panose="02020603050405020304" charset="0"/>
-              <a:ea typeface="Montserrat"/>
-              <a:cs typeface="Times New Roman" panose="02020603050405020304" charset="0"/>
-              <a:sym typeface="Montserrat"/>
-            </a:endParaRPr>
           </a:p>
         </p:txBody>
       </p:sp>
@@ -11396,15 +12305,6 @@
               </a:rPr>
               <a:t> Создание реляционной структуры для хранения данных клиентов и транзакций.</a:t>
             </a:r>
-            <a:endParaRPr lang="en-US" sz="1650" b="0" i="0" u="none" strike="noStrike" cap="none">
-              <a:solidFill>
-                <a:srgbClr val="475569"/>
-              </a:solidFill>
-              <a:latin typeface="Times New Roman" panose="02020603050405020304" charset="0"/>
-              <a:ea typeface="Open Sans"/>
-              <a:cs typeface="Times New Roman" panose="02020603050405020304" charset="0"/>
-              <a:sym typeface="Open Sans"/>
-            </a:endParaRPr>
           </a:p>
         </p:txBody>
       </p:sp>
@@ -11469,15 +12369,6 @@
               </a:rPr>
               <a:t> Создание удобной среды для работы кредитного специалиста на базе WPF.</a:t>
             </a:r>
-            <a:endParaRPr lang="en-US" sz="1650" b="0" i="0" u="none" strike="noStrike" cap="none">
-              <a:solidFill>
-                <a:srgbClr val="475569"/>
-              </a:solidFill>
-              <a:latin typeface="Times New Roman" panose="02020603050405020304" charset="0"/>
-              <a:ea typeface="Open Sans"/>
-              <a:cs typeface="Times New Roman" panose="02020603050405020304" charset="0"/>
-              <a:sym typeface="Open Sans"/>
-            </a:endParaRPr>
           </a:p>
         </p:txBody>
       </p:sp>
@@ -11542,15 +12433,6 @@
               </a:rPr>
               <a:t> Реализация логики контроля лимитов и расчета выплат.</a:t>
             </a:r>
-            <a:endParaRPr lang="en-US" sz="1650" b="0" i="0" u="none" strike="noStrike" cap="none">
-              <a:solidFill>
-                <a:srgbClr val="475569"/>
-              </a:solidFill>
-              <a:latin typeface="Times New Roman" panose="02020603050405020304" charset="0"/>
-              <a:ea typeface="Open Sans"/>
-              <a:cs typeface="Times New Roman" panose="02020603050405020304" charset="0"/>
-              <a:sym typeface="Open Sans"/>
-            </a:endParaRPr>
           </a:p>
         </p:txBody>
       </p:sp>
@@ -11615,15 +12497,6 @@
               </a:rPr>
               <a:t> Внедрение визуализации данных для оценки кредитного портфеля.</a:t>
             </a:r>
-            <a:endParaRPr lang="en-US" sz="1650" b="0" i="0" u="none" strike="noStrike" cap="none">
-              <a:solidFill>
-                <a:srgbClr val="475569"/>
-              </a:solidFill>
-              <a:latin typeface="Times New Roman" panose="02020603050405020304" charset="0"/>
-              <a:ea typeface="Open Sans"/>
-              <a:cs typeface="Times New Roman" panose="02020603050405020304" charset="0"/>
-              <a:sym typeface="Open Sans"/>
-            </a:endParaRPr>
           </a:p>
         </p:txBody>
       </p:sp>
@@ -11634,7 +12507,7 @@
           <p:nvPr/>
         </p:nvPicPr>
         <p:blipFill rotWithShape="1">
-          <a:blip r:embed="rId2"/>
+          <a:blip r:embed="rId4"/>
           <a:srcRect/>
           <a:stretch>
             <a:fillRect/>
@@ -11661,7 +12534,7 @@
           <p:nvPr/>
         </p:nvPicPr>
         <p:blipFill rotWithShape="1">
-          <a:blip r:embed="rId3"/>
+          <a:blip r:embed="rId5"/>
           <a:srcRect/>
           <a:stretch>
             <a:fillRect/>
@@ -11688,7 +12561,7 @@
           <p:nvPr/>
         </p:nvPicPr>
         <p:blipFill rotWithShape="1">
-          <a:blip r:embed="rId4"/>
+          <a:blip r:embed="rId6"/>
           <a:srcRect/>
           <a:stretch>
             <a:fillRect/>
@@ -11715,7 +12588,7 @@
           <p:nvPr/>
         </p:nvPicPr>
         <p:blipFill rotWithShape="1">
-          <a:blip r:embed="rId5"/>
+          <a:blip r:embed="rId7"/>
           <a:srcRect/>
           <a:stretch>
             <a:fillRect/>
@@ -11756,7 +12629,7 @@
     </p:bg>
     <p:spTree>
       <p:nvGrpSpPr>
-        <p:cNvPr id="106" name="Shape 106"/>
+        <p:cNvPr id="1" name="Shape 106"/>
         <p:cNvGrpSpPr/>
         <p:nvPr/>
       </p:nvGrpSpPr>
@@ -11775,7 +12648,7 @@
           <p:nvPr/>
         </p:nvPicPr>
         <p:blipFill rotWithShape="1">
-          <a:blip r:embed="rId1"/>
+          <a:blip r:embed="rId3"/>
           <a:srcRect/>
           <a:stretch>
             <a:fillRect/>
@@ -11802,7 +12675,7 @@
           <p:nvPr/>
         </p:nvPicPr>
         <p:blipFill rotWithShape="1">
-          <a:blip r:embed="rId2"/>
+          <a:blip r:embed="rId4"/>
           <a:srcRect/>
           <a:stretch>
             <a:fillRect/>
@@ -11868,15 +12741,6 @@
               </a:rPr>
               <a:t>Актуальность автоматизации</a:t>
             </a:r>
-            <a:endParaRPr lang="en-US" sz="3000" b="1" i="0" u="none" strike="noStrike" cap="none">
-              <a:solidFill>
-                <a:srgbClr val="005088"/>
-              </a:solidFill>
-              <a:latin typeface="Times New Roman" panose="02020603050405020304" charset="0"/>
-              <a:ea typeface="Montserrat"/>
-              <a:cs typeface="Times New Roman" panose="02020603050405020304" charset="0"/>
-              <a:sym typeface="Montserrat"/>
-            </a:endParaRPr>
           </a:p>
         </p:txBody>
       </p:sp>
@@ -12001,15 +12865,6 @@
               </a:rPr>
               <a:t>:</a:t>
             </a:r>
-            <a:endParaRPr lang="en-US" sz="1650" b="0" i="0" u="none" strike="noStrike" cap="none">
-              <a:solidFill>
-                <a:srgbClr val="475569"/>
-              </a:solidFill>
-              <a:latin typeface="Times New Roman" panose="02020603050405020304" charset="0"/>
-              <a:ea typeface="Open Sans"/>
-              <a:cs typeface="Times New Roman" panose="02020603050405020304" charset="0"/>
-              <a:sym typeface="Open Sans"/>
-            </a:endParaRPr>
           </a:p>
         </p:txBody>
       </p:sp>
@@ -12086,15 +12941,6 @@
               </a:rPr>
               <a:t> и прозрачность учета.</a:t>
             </a:r>
-            <a:endParaRPr lang="en-US" sz="1650" b="0" i="0" u="none" strike="noStrike" cap="none">
-              <a:solidFill>
-                <a:srgbClr val="475569"/>
-              </a:solidFill>
-              <a:latin typeface="Times New Roman" panose="02020603050405020304" charset="0"/>
-              <a:ea typeface="Open Sans"/>
-              <a:cs typeface="Times New Roman" panose="02020603050405020304" charset="0"/>
-              <a:sym typeface="Open Sans"/>
-            </a:endParaRPr>
           </a:p>
         </p:txBody>
       </p:sp>
@@ -12144,15 +12990,6 @@
               </a:rPr>
               <a:t>•</a:t>
             </a:r>
-            <a:endParaRPr lang="en-US" sz="1650" b="0" i="0" u="none" strike="noStrike" cap="none">
-              <a:solidFill>
-                <a:srgbClr val="475569"/>
-              </a:solidFill>
-              <a:latin typeface="Times New Roman" panose="02020603050405020304" charset="0"/>
-              <a:ea typeface="Open Sans"/>
-              <a:cs typeface="Times New Roman" panose="02020603050405020304" charset="0"/>
-              <a:sym typeface="Open Sans"/>
-            </a:endParaRPr>
           </a:p>
         </p:txBody>
       </p:sp>
@@ -12205,15 +13042,6 @@
               </a:rPr>
               <a:t>Человеческий фактор при вводе данных.</a:t>
             </a:r>
-            <a:endParaRPr lang="en-US" sz="1650" b="0" i="0" u="none" strike="noStrike" cap="none">
-              <a:solidFill>
-                <a:srgbClr val="475569"/>
-              </a:solidFill>
-              <a:latin typeface="Times New Roman" panose="02020603050405020304" charset="0"/>
-              <a:ea typeface="Open Sans"/>
-              <a:cs typeface="Times New Roman" panose="02020603050405020304" charset="0"/>
-              <a:sym typeface="Open Sans"/>
-            </a:endParaRPr>
           </a:p>
         </p:txBody>
       </p:sp>
@@ -12263,15 +13091,6 @@
               </a:rPr>
               <a:t>•</a:t>
             </a:r>
-            <a:endParaRPr lang="en-US" sz="1650" b="0" i="0" u="none" strike="noStrike" cap="none">
-              <a:solidFill>
-                <a:srgbClr val="475569"/>
-              </a:solidFill>
-              <a:latin typeface="Times New Roman" panose="02020603050405020304" charset="0"/>
-              <a:ea typeface="Open Sans"/>
-              <a:cs typeface="Times New Roman" panose="02020603050405020304" charset="0"/>
-              <a:sym typeface="Open Sans"/>
-            </a:endParaRPr>
           </a:p>
         </p:txBody>
       </p:sp>
@@ -12324,15 +13143,6 @@
               </a:rPr>
               <a:t>Сложность контроля сроков платежей.</a:t>
             </a:r>
-            <a:endParaRPr lang="en-US" sz="1650" b="0" i="0" u="none" strike="noStrike" cap="none">
-              <a:solidFill>
-                <a:srgbClr val="475569"/>
-              </a:solidFill>
-              <a:latin typeface="Times New Roman" panose="02020603050405020304" charset="0"/>
-              <a:ea typeface="Open Sans"/>
-              <a:cs typeface="Times New Roman" panose="02020603050405020304" charset="0"/>
-              <a:sym typeface="Open Sans"/>
-            </a:endParaRPr>
           </a:p>
         </p:txBody>
       </p:sp>
@@ -12382,15 +13192,6 @@
               </a:rPr>
               <a:t>•</a:t>
             </a:r>
-            <a:endParaRPr lang="en-US" sz="1650" b="0" i="0" u="none" strike="noStrike" cap="none">
-              <a:solidFill>
-                <a:srgbClr val="475569"/>
-              </a:solidFill>
-              <a:latin typeface="Times New Roman" panose="02020603050405020304" charset="0"/>
-              <a:ea typeface="Open Sans"/>
-              <a:cs typeface="Times New Roman" panose="02020603050405020304" charset="0"/>
-              <a:sym typeface="Open Sans"/>
-            </a:endParaRPr>
           </a:p>
         </p:txBody>
       </p:sp>
@@ -12443,15 +13244,6 @@
               </a:rPr>
               <a:t>Отсутствие оперативной статистики.</a:t>
             </a:r>
-            <a:endParaRPr lang="en-US" sz="1650" b="0" i="0" u="none" strike="noStrike" cap="none">
-              <a:solidFill>
-                <a:srgbClr val="475569"/>
-              </a:solidFill>
-              <a:latin typeface="Times New Roman" panose="02020603050405020304" charset="0"/>
-              <a:ea typeface="Open Sans"/>
-              <a:cs typeface="Times New Roman" panose="02020603050405020304" charset="0"/>
-              <a:sym typeface="Open Sans"/>
-            </a:endParaRPr>
           </a:p>
         </p:txBody>
       </p:sp>
@@ -12462,7 +13254,7 @@
           <p:nvPr/>
         </p:nvPicPr>
         <p:blipFill>
-          <a:blip r:embed="rId3"/>
+          <a:blip r:embed="rId5"/>
           <a:stretch>
             <a:fillRect/>
           </a:stretch>
@@ -12498,7 +13290,7 @@
     </p:bg>
     <p:spTree>
       <p:nvGrpSpPr>
-        <p:cNvPr id="123" name="Shape 123"/>
+        <p:cNvPr id="1" name="Shape 123"/>
         <p:cNvGrpSpPr/>
         <p:nvPr/>
       </p:nvGrpSpPr>
@@ -12517,7 +13309,7 @@
           <p:nvPr/>
         </p:nvPicPr>
         <p:blipFill rotWithShape="1">
-          <a:blip r:embed="rId1"/>
+          <a:blip r:embed="rId3"/>
           <a:srcRect/>
           <a:stretch>
             <a:fillRect/>
@@ -12544,7 +13336,7 @@
           <p:nvPr/>
         </p:nvPicPr>
         <p:blipFill rotWithShape="1">
-          <a:blip r:embed="rId2"/>
+          <a:blip r:embed="rId4"/>
           <a:srcRect/>
           <a:stretch>
             <a:fillRect/>
@@ -12571,7 +13363,7 @@
           <p:nvPr/>
         </p:nvPicPr>
         <p:blipFill rotWithShape="1">
-          <a:blip r:embed="rId3"/>
+          <a:blip r:embed="rId5"/>
           <a:srcRect/>
           <a:stretch>
             <a:fillRect/>
@@ -12598,7 +13390,7 @@
           <p:nvPr/>
         </p:nvPicPr>
         <p:blipFill rotWithShape="1">
-          <a:blip r:embed="rId4"/>
+          <a:blip r:embed="rId6"/>
           <a:srcRect/>
           <a:stretch>
             <a:fillRect/>
@@ -12625,7 +13417,7 @@
           <p:nvPr/>
         </p:nvPicPr>
         <p:blipFill rotWithShape="1">
-          <a:blip r:embed="rId5"/>
+          <a:blip r:embed="rId7"/>
           <a:srcRect/>
           <a:stretch>
             <a:fillRect/>
@@ -12652,7 +13444,7 @@
           <p:nvPr/>
         </p:nvPicPr>
         <p:blipFill rotWithShape="1">
-          <a:blip r:embed="rId3"/>
+          <a:blip r:embed="rId5"/>
           <a:srcRect/>
           <a:stretch>
             <a:fillRect/>
@@ -12718,15 +13510,6 @@
               </a:rPr>
               <a:t>Логика работы приложения</a:t>
             </a:r>
-            <a:endParaRPr lang="en-US" sz="3000" b="1" i="0" u="none" strike="noStrike" cap="none">
-              <a:solidFill>
-                <a:srgbClr val="005088"/>
-              </a:solidFill>
-              <a:latin typeface="Times New Roman" panose="02020603050405020304" charset="0"/>
-              <a:ea typeface="Montserrat"/>
-              <a:cs typeface="Times New Roman" panose="02020603050405020304" charset="0"/>
-              <a:sym typeface="Montserrat"/>
-            </a:endParaRPr>
           </a:p>
         </p:txBody>
       </p:sp>
@@ -12785,7 +13568,7 @@
           <p:nvPr/>
         </p:nvPicPr>
         <p:blipFill rotWithShape="1">
-          <a:blip r:embed="rId6"/>
+          <a:blip r:embed="rId8"/>
           <a:srcRect/>
           <a:stretch>
             <a:fillRect/>
@@ -12851,15 +13634,6 @@
               </a:rPr>
               <a:t>Клиенты</a:t>
             </a:r>
-            <a:endParaRPr lang="en-US" sz="1800" b="1" i="0" u="none" strike="noStrike" cap="none">
-              <a:solidFill>
-                <a:srgbClr val="005088"/>
-              </a:solidFill>
-              <a:latin typeface="Times New Roman" panose="02020603050405020304" charset="0"/>
-              <a:ea typeface="Montserrat"/>
-              <a:cs typeface="Times New Roman" panose="02020603050405020304" charset="0"/>
-              <a:sym typeface="Montserrat"/>
-            </a:endParaRPr>
           </a:p>
         </p:txBody>
       </p:sp>
@@ -12912,15 +13686,6 @@
               </a:rPr>
               <a:t>Регистрация заемщиков и ведение анкет с валидацией данных.</a:t>
             </a:r>
-            <a:endParaRPr lang="en-US" sz="1650" b="0" i="0" u="none" strike="noStrike" cap="none">
-              <a:solidFill>
-                <a:srgbClr val="475569"/>
-              </a:solidFill>
-              <a:latin typeface="Times New Roman" panose="02020603050405020304" charset="0"/>
-              <a:ea typeface="Open Sans"/>
-              <a:cs typeface="Times New Roman" panose="02020603050405020304" charset="0"/>
-              <a:sym typeface="Open Sans"/>
-            </a:endParaRPr>
           </a:p>
         </p:txBody>
       </p:sp>
@@ -12970,15 +13735,6 @@
               </a:rPr>
               <a:t>Договоры</a:t>
             </a:r>
-            <a:endParaRPr lang="en-US" sz="1800" b="1" i="0" u="none" strike="noStrike" cap="none">
-              <a:solidFill>
-                <a:srgbClr val="005088"/>
-              </a:solidFill>
-              <a:latin typeface="Times New Roman" panose="02020603050405020304" charset="0"/>
-              <a:ea typeface="Montserrat"/>
-              <a:cs typeface="Times New Roman" panose="02020603050405020304" charset="0"/>
-              <a:sym typeface="Montserrat"/>
-            </a:endParaRPr>
           </a:p>
         </p:txBody>
       </p:sp>
@@ -13031,15 +13787,6 @@
               </a:rPr>
               <a:t>Выдача займов на основе тарифных планов банка.</a:t>
             </a:r>
-            <a:endParaRPr lang="en-US" sz="1650" b="0" i="0" u="none" strike="noStrike" cap="none">
-              <a:solidFill>
-                <a:srgbClr val="475569"/>
-              </a:solidFill>
-              <a:latin typeface="Times New Roman" panose="02020603050405020304" charset="0"/>
-              <a:ea typeface="Open Sans"/>
-              <a:cs typeface="Times New Roman" panose="02020603050405020304" charset="0"/>
-              <a:sym typeface="Open Sans"/>
-            </a:endParaRPr>
           </a:p>
         </p:txBody>
       </p:sp>
@@ -13089,15 +13836,6 @@
               </a:rPr>
               <a:t>Платежи</a:t>
             </a:r>
-            <a:endParaRPr lang="en-US" sz="1800" b="1" i="0" u="none" strike="noStrike" cap="none">
-              <a:solidFill>
-                <a:srgbClr val="005088"/>
-              </a:solidFill>
-              <a:latin typeface="Times New Roman" panose="02020603050405020304" charset="0"/>
-              <a:ea typeface="Montserrat"/>
-              <a:cs typeface="Times New Roman" panose="02020603050405020304" charset="0"/>
-              <a:sym typeface="Montserrat"/>
-            </a:endParaRPr>
           </a:p>
         </p:txBody>
       </p:sp>
@@ -13150,15 +13888,6 @@
               </a:rPr>
               <a:t>Автоматизированный учет взносов и погашения долга.</a:t>
             </a:r>
-            <a:endParaRPr lang="en-US" sz="1650" b="0" i="0" u="none" strike="noStrike" cap="none">
-              <a:solidFill>
-                <a:srgbClr val="475569"/>
-              </a:solidFill>
-              <a:latin typeface="Times New Roman" panose="02020603050405020304" charset="0"/>
-              <a:ea typeface="Open Sans"/>
-              <a:cs typeface="Times New Roman" panose="02020603050405020304" charset="0"/>
-              <a:sym typeface="Open Sans"/>
-            </a:endParaRPr>
           </a:p>
         </p:txBody>
       </p:sp>
@@ -13208,15 +13937,6 @@
               </a:rPr>
               <a:t>Контроль</a:t>
             </a:r>
-            <a:endParaRPr lang="en-US" sz="1800" b="1" i="0" u="none" strike="noStrike" cap="none">
-              <a:solidFill>
-                <a:srgbClr val="005088"/>
-              </a:solidFill>
-              <a:latin typeface="Times New Roman" panose="02020603050405020304" charset="0"/>
-              <a:ea typeface="Montserrat"/>
-              <a:cs typeface="Times New Roman" panose="02020603050405020304" charset="0"/>
-              <a:sym typeface="Montserrat"/>
-            </a:endParaRPr>
           </a:p>
         </p:txBody>
       </p:sp>
@@ -13269,15 +13989,6 @@
               </a:rPr>
               <a:t>Отслеживание статусов «Активен», «Закрыт» и «Просрочен».</a:t>
             </a:r>
-            <a:endParaRPr lang="en-US" sz="1650" b="0" i="0" u="none" strike="noStrike" cap="none">
-              <a:solidFill>
-                <a:srgbClr val="475569"/>
-              </a:solidFill>
-              <a:latin typeface="Times New Roman" panose="02020603050405020304" charset="0"/>
-              <a:ea typeface="Open Sans"/>
-              <a:cs typeface="Times New Roman" panose="02020603050405020304" charset="0"/>
-              <a:sym typeface="Open Sans"/>
-            </a:endParaRPr>
           </a:p>
         </p:txBody>
       </p:sp>
@@ -13288,7 +13999,7 @@
           <p:nvPr/>
         </p:nvPicPr>
         <p:blipFill rotWithShape="1">
-          <a:blip r:embed="rId7"/>
+          <a:blip r:embed="rId9"/>
           <a:srcRect/>
           <a:stretch>
             <a:fillRect/>
@@ -13315,7 +14026,7 @@
           <p:nvPr/>
         </p:nvPicPr>
         <p:blipFill rotWithShape="1">
-          <a:blip r:embed="rId8"/>
+          <a:blip r:embed="rId10"/>
           <a:srcRect/>
           <a:stretch>
             <a:fillRect/>
@@ -13342,7 +14053,7 @@
           <p:nvPr/>
         </p:nvPicPr>
         <p:blipFill rotWithShape="1">
-          <a:blip r:embed="rId9"/>
+          <a:blip r:embed="rId11"/>
           <a:srcRect/>
           <a:stretch>
             <a:fillRect/>
@@ -13369,7 +14080,7 @@
           <p:nvPr/>
         </p:nvPicPr>
         <p:blipFill rotWithShape="1">
-          <a:blip r:embed="rId10"/>
+          <a:blip r:embed="rId12"/>
           <a:srcRect/>
           <a:stretch>
             <a:fillRect/>
@@ -13410,7 +14121,7 @@
     </p:bg>
     <p:spTree>
       <p:nvGrpSpPr>
-        <p:cNvPr id="148" name="Shape 148"/>
+        <p:cNvPr id="1" name="Shape 148"/>
         <p:cNvGrpSpPr/>
         <p:nvPr/>
       </p:nvGrpSpPr>
@@ -13429,7 +14140,7 @@
           <p:nvPr/>
         </p:nvPicPr>
         <p:blipFill rotWithShape="1">
-          <a:blip r:embed="rId1"/>
+          <a:blip r:embed="rId3"/>
           <a:srcRect/>
           <a:stretch>
             <a:fillRect/>
@@ -13495,15 +14206,6 @@
               </a:rPr>
               <a:t>Структура базы данных</a:t>
             </a:r>
-            <a:endParaRPr lang="en-US" sz="3000" b="1" i="0" u="none" strike="noStrike" cap="none">
-              <a:solidFill>
-                <a:srgbClr val="005088"/>
-              </a:solidFill>
-              <a:latin typeface="Times New Roman" panose="02020603050405020304" charset="0"/>
-              <a:ea typeface="Montserrat"/>
-              <a:cs typeface="Times New Roman" panose="02020603050405020304" charset="0"/>
-              <a:sym typeface="Montserrat"/>
-            </a:endParaRPr>
           </a:p>
         </p:txBody>
       </p:sp>
@@ -13604,15 +14306,6 @@
               </a:rPr>
               <a:t>Реляционная модель включает 4 основные сущности:</a:t>
             </a:r>
-            <a:endParaRPr lang="en-US" sz="1650" b="0" i="0" u="none" strike="noStrike" cap="none">
-              <a:solidFill>
-                <a:srgbClr val="475569"/>
-              </a:solidFill>
-              <a:latin typeface="Times New Roman" panose="02020603050405020304" charset="0"/>
-              <a:ea typeface="Open Sans"/>
-              <a:cs typeface="Times New Roman" panose="02020603050405020304" charset="0"/>
-              <a:sym typeface="Open Sans"/>
-            </a:endParaRPr>
           </a:p>
         </p:txBody>
       </p:sp>
@@ -13634,9 +14327,27 @@
                 <a:tableStyleId>{D6B973DD-A9D6-4AF0-87D7-36E7D2D6F2D2}</a:tableStyleId>
               </a:tblPr>
               <a:tblGrid>
-                <a:gridCol w="2730400"/>
-                <a:gridCol w="4508450"/>
-                <a:gridCol w="3810150"/>
+                <a:gridCol w="2730400">
+                  <a:extLst>
+                    <a:ext uri="{9D8B030D-6E8A-4147-A177-3AD203B41FA5}">
+                      <a16:colId xmlns:a16="http://schemas.microsoft.com/office/drawing/2014/main" val="20000"/>
+                    </a:ext>
+                  </a:extLst>
+                </a:gridCol>
+                <a:gridCol w="4508450">
+                  <a:extLst>
+                    <a:ext uri="{9D8B030D-6E8A-4147-A177-3AD203B41FA5}">
+                      <a16:colId xmlns:a16="http://schemas.microsoft.com/office/drawing/2014/main" val="20001"/>
+                    </a:ext>
+                  </a:extLst>
+                </a:gridCol>
+                <a:gridCol w="3810150">
+                  <a:extLst>
+                    <a:ext uri="{9D8B030D-6E8A-4147-A177-3AD203B41FA5}">
+                      <a16:colId xmlns:a16="http://schemas.microsoft.com/office/drawing/2014/main" val="20002"/>
+                    </a:ext>
+                  </a:extLst>
+                </a:gridCol>
               </a:tblGrid>
               <a:tr h="621025">
                 <a:tc>
@@ -13665,15 +14376,6 @@
                         </a:rPr>
                         <a:t>Таблица</a:t>
                       </a:r>
-                      <a:endParaRPr lang="en-US" sz="1650" b="1" i="0" u="none" strike="noStrike" cap="none">
-                        <a:solidFill>
-                          <a:srgbClr val="FFFFFF"/>
-                        </a:solidFill>
-                        <a:latin typeface="Times New Roman" panose="02020603050405020304" charset="0"/>
-                        <a:ea typeface="Open Sans"/>
-                        <a:cs typeface="Times New Roman" panose="02020603050405020304" charset="0"/>
-                        <a:sym typeface="Open Sans"/>
-                      </a:endParaRPr>
                     </a:p>
                   </a:txBody>
                   <a:tcPr marL="63500" marR="63500" marT="25400" marB="25400" anchor="ctr">
@@ -13738,15 +14440,6 @@
                         </a:rPr>
                         <a:t>Назначение</a:t>
                       </a:r>
-                      <a:endParaRPr lang="en-US" sz="1650" b="1" i="0" u="none" strike="noStrike" cap="none">
-                        <a:solidFill>
-                          <a:srgbClr val="FFFFFF"/>
-                        </a:solidFill>
-                        <a:latin typeface="Times New Roman" panose="02020603050405020304" charset="0"/>
-                        <a:ea typeface="Open Sans"/>
-                        <a:cs typeface="Times New Roman" panose="02020603050405020304" charset="0"/>
-                        <a:sym typeface="Open Sans"/>
-                      </a:endParaRPr>
                     </a:p>
                   </a:txBody>
                   <a:tcPr marL="63500" marR="63500" marT="25400" marB="25400" anchor="ctr">
@@ -13811,15 +14504,6 @@
                         </a:rPr>
                         <a:t>Ключевые поля</a:t>
                       </a:r>
-                      <a:endParaRPr lang="en-US" sz="1650" b="1" i="0" u="none" strike="noStrike" cap="none">
-                        <a:solidFill>
-                          <a:srgbClr val="FFFFFF"/>
-                        </a:solidFill>
-                        <a:latin typeface="Times New Roman" panose="02020603050405020304" charset="0"/>
-                        <a:ea typeface="Open Sans"/>
-                        <a:cs typeface="Times New Roman" panose="02020603050405020304" charset="0"/>
-                        <a:sym typeface="Open Sans"/>
-                      </a:endParaRPr>
                     </a:p>
                   </a:txBody>
                   <a:tcPr marL="63500" marR="63500" marT="25400" marB="25400" anchor="ctr">
@@ -13858,6 +14542,11 @@
                     </a:solidFill>
                   </a:tcPr>
                 </a:tc>
+                <a:extLst>
+                  <a:ext uri="{0D108BD9-81ED-4DB2-BD59-A6C34878D82A}">
+                    <a16:rowId xmlns:a16="http://schemas.microsoft.com/office/drawing/2014/main" val="10000"/>
+                  </a:ext>
+                </a:extLst>
               </a:tr>
               <a:tr h="621025">
                 <a:tc>
@@ -13886,15 +14575,6 @@
                         </a:rPr>
                         <a:t>Клиенты</a:t>
                       </a:r>
-                      <a:endParaRPr lang="en-US" sz="1500" b="1" i="0" u="none" strike="noStrike" cap="none">
-                        <a:solidFill>
-                          <a:srgbClr val="1E293B"/>
-                        </a:solidFill>
-                        <a:latin typeface="Times New Roman" panose="02020603050405020304" charset="0"/>
-                        <a:ea typeface="Open Sans"/>
-                        <a:cs typeface="Times New Roman" panose="02020603050405020304" charset="0"/>
-                        <a:sym typeface="Open Sans"/>
-                      </a:endParaRPr>
                     </a:p>
                   </a:txBody>
                   <a:tcPr marL="63500" marR="63500" marT="25400" marB="25400" anchor="ctr">
@@ -13956,15 +14636,6 @@
                         </a:rPr>
                         <a:t>База персональных данных заемщиков</a:t>
                       </a:r>
-                      <a:endParaRPr lang="en-US" sz="1500" b="0" i="0" u="none" strike="noStrike" cap="none">
-                        <a:solidFill>
-                          <a:srgbClr val="1E293B"/>
-                        </a:solidFill>
-                        <a:latin typeface="Times New Roman" panose="02020603050405020304" charset="0"/>
-                        <a:ea typeface="Open Sans"/>
-                        <a:cs typeface="Times New Roman" panose="02020603050405020304" charset="0"/>
-                        <a:sym typeface="Open Sans"/>
-                      </a:endParaRPr>
                     </a:p>
                   </a:txBody>
                   <a:tcPr marL="63500" marR="63500" marT="25400" marB="25400" anchor="ctr">
@@ -14026,15 +14697,6 @@
                         </a:rPr>
                         <a:t>ID, ФИО, Паспорт, Телефон</a:t>
                       </a:r>
-                      <a:endParaRPr lang="en-US" sz="1500" b="0" i="0" u="none" strike="noStrike" cap="none">
-                        <a:solidFill>
-                          <a:srgbClr val="1E293B"/>
-                        </a:solidFill>
-                        <a:latin typeface="Times New Roman" panose="02020603050405020304" charset="0"/>
-                        <a:ea typeface="Open Sans"/>
-                        <a:cs typeface="Times New Roman" panose="02020603050405020304" charset="0"/>
-                        <a:sym typeface="Open Sans"/>
-                      </a:endParaRPr>
                     </a:p>
                   </a:txBody>
                   <a:tcPr marL="63500" marR="63500" marT="25400" marB="25400" anchor="ctr">
@@ -14070,6 +14732,11 @@
                     </a:lnBlToTr>
                   </a:tcPr>
                 </a:tc>
+                <a:extLst>
+                  <a:ext uri="{0D108BD9-81ED-4DB2-BD59-A6C34878D82A}">
+                    <a16:rowId xmlns:a16="http://schemas.microsoft.com/office/drawing/2014/main" val="10001"/>
+                  </a:ext>
+                </a:extLst>
               </a:tr>
               <a:tr h="621025">
                 <a:tc>
@@ -14098,15 +14765,6 @@
                         </a:rPr>
                         <a:t>Кредитные Продукты</a:t>
                       </a:r>
-                      <a:endParaRPr lang="en-US" sz="1500" b="1" i="0" u="none" strike="noStrike" cap="none">
-                        <a:solidFill>
-                          <a:srgbClr val="1E293B"/>
-                        </a:solidFill>
-                        <a:latin typeface="Times New Roman" panose="02020603050405020304" charset="0"/>
-                        <a:ea typeface="Open Sans"/>
-                        <a:cs typeface="Times New Roman" panose="02020603050405020304" charset="0"/>
-                        <a:sym typeface="Open Sans"/>
-                      </a:endParaRPr>
                     </a:p>
                   </a:txBody>
                   <a:tcPr marL="63500" marR="63500" marT="25400" marB="25400" anchor="ctr">
@@ -14171,15 +14829,6 @@
                         </a:rPr>
                         <a:t>Справочник условий (тарифы)</a:t>
                       </a:r>
-                      <a:endParaRPr lang="en-US" sz="1500" b="0" i="0" u="none" strike="noStrike" cap="none">
-                        <a:solidFill>
-                          <a:srgbClr val="1E293B"/>
-                        </a:solidFill>
-                        <a:latin typeface="Times New Roman" panose="02020603050405020304" charset="0"/>
-                        <a:ea typeface="Open Sans"/>
-                        <a:cs typeface="Times New Roman" panose="02020603050405020304" charset="0"/>
-                        <a:sym typeface="Open Sans"/>
-                      </a:endParaRPr>
                     </a:p>
                   </a:txBody>
                   <a:tcPr marL="63500" marR="63500" marT="25400" marB="25400" anchor="ctr">
@@ -14244,15 +14893,6 @@
                         </a:rPr>
                         <a:t>Название, Процент, Макс. сумма</a:t>
                       </a:r>
-                      <a:endParaRPr lang="en-US" sz="1500" b="0" i="0" u="none" strike="noStrike" cap="none">
-                        <a:solidFill>
-                          <a:srgbClr val="1E293B"/>
-                        </a:solidFill>
-                        <a:latin typeface="Times New Roman" panose="02020603050405020304" charset="0"/>
-                        <a:ea typeface="Open Sans"/>
-                        <a:cs typeface="Times New Roman" panose="02020603050405020304" charset="0"/>
-                        <a:sym typeface="Open Sans"/>
-                      </a:endParaRPr>
                     </a:p>
                   </a:txBody>
                   <a:tcPr marL="63500" marR="63500" marT="25400" marB="25400" anchor="ctr">
@@ -14291,6 +14931,11 @@
                     </a:solidFill>
                   </a:tcPr>
                 </a:tc>
+                <a:extLst>
+                  <a:ext uri="{0D108BD9-81ED-4DB2-BD59-A6C34878D82A}">
+                    <a16:rowId xmlns:a16="http://schemas.microsoft.com/office/drawing/2014/main" val="10002"/>
+                  </a:ext>
+                </a:extLst>
               </a:tr>
               <a:tr h="621025">
                 <a:tc>
@@ -14319,15 +14964,6 @@
                         </a:rPr>
                         <a:t>Займы</a:t>
                       </a:r>
-                      <a:endParaRPr lang="en-US" sz="1500" b="1" i="0" u="none" strike="noStrike" cap="none">
-                        <a:solidFill>
-                          <a:srgbClr val="1E293B"/>
-                        </a:solidFill>
-                        <a:latin typeface="Times New Roman" panose="02020603050405020304" charset="0"/>
-                        <a:ea typeface="Open Sans"/>
-                        <a:cs typeface="Times New Roman" panose="02020603050405020304" charset="0"/>
-                        <a:sym typeface="Open Sans"/>
-                      </a:endParaRPr>
                     </a:p>
                   </a:txBody>
                   <a:tcPr marL="63500" marR="63500" marT="25400" marB="25400" anchor="ctr">
@@ -14389,15 +15025,6 @@
                         </a:rPr>
                         <a:t>Журнал выданных договоров</a:t>
                       </a:r>
-                      <a:endParaRPr lang="en-US" sz="1500" b="0" i="0" u="none" strike="noStrike" cap="none">
-                        <a:solidFill>
-                          <a:srgbClr val="1E293B"/>
-                        </a:solidFill>
-                        <a:latin typeface="Times New Roman" panose="02020603050405020304" charset="0"/>
-                        <a:ea typeface="Open Sans"/>
-                        <a:cs typeface="Times New Roman" panose="02020603050405020304" charset="0"/>
-                        <a:sym typeface="Open Sans"/>
-                      </a:endParaRPr>
                     </a:p>
                   </a:txBody>
                   <a:tcPr marL="63500" marR="63500" marT="25400" marB="25400" anchor="ctr">
@@ -14459,15 +15086,6 @@
                         </a:rPr>
                         <a:t>ID_Клиента, ID_Продукта, Сумма</a:t>
                       </a:r>
-                      <a:endParaRPr lang="en-US" sz="1500" b="0" i="0" u="none" strike="noStrike" cap="none">
-                        <a:solidFill>
-                          <a:srgbClr val="1E293B"/>
-                        </a:solidFill>
-                        <a:latin typeface="Times New Roman" panose="02020603050405020304" charset="0"/>
-                        <a:ea typeface="Open Sans"/>
-                        <a:cs typeface="Times New Roman" panose="02020603050405020304" charset="0"/>
-                        <a:sym typeface="Open Sans"/>
-                      </a:endParaRPr>
                     </a:p>
                   </a:txBody>
                   <a:tcPr marL="63500" marR="63500" marT="25400" marB="25400" anchor="ctr">
@@ -14503,6 +15121,11 @@
                     </a:lnBlToTr>
                   </a:tcPr>
                 </a:tc>
+                <a:extLst>
+                  <a:ext uri="{0D108BD9-81ED-4DB2-BD59-A6C34878D82A}">
+                    <a16:rowId xmlns:a16="http://schemas.microsoft.com/office/drawing/2014/main" val="10003"/>
+                  </a:ext>
+                </a:extLst>
               </a:tr>
               <a:tr h="621025">
                 <a:tc>
@@ -14531,15 +15154,6 @@
                         </a:rPr>
                         <a:t>Платежи</a:t>
                       </a:r>
-                      <a:endParaRPr lang="en-US" sz="1500" b="1" i="0" u="none" strike="noStrike" cap="none">
-                        <a:solidFill>
-                          <a:srgbClr val="1E293B"/>
-                        </a:solidFill>
-                        <a:latin typeface="Times New Roman" panose="02020603050405020304" charset="0"/>
-                        <a:ea typeface="Open Sans"/>
-                        <a:cs typeface="Times New Roman" panose="02020603050405020304" charset="0"/>
-                        <a:sym typeface="Open Sans"/>
-                      </a:endParaRPr>
                     </a:p>
                   </a:txBody>
                   <a:tcPr marL="63500" marR="63500" marT="25400" marB="25400" anchor="ctr">
@@ -14604,15 +15218,6 @@
                         </a:rPr>
                         <a:t>История финансовых транзакций</a:t>
                       </a:r>
-                      <a:endParaRPr lang="en-US" sz="1500" b="0" i="0" u="none" strike="noStrike" cap="none">
-                        <a:solidFill>
-                          <a:srgbClr val="1E293B"/>
-                        </a:solidFill>
-                        <a:latin typeface="Times New Roman" panose="02020603050405020304" charset="0"/>
-                        <a:ea typeface="Open Sans"/>
-                        <a:cs typeface="Times New Roman" panose="02020603050405020304" charset="0"/>
-                        <a:sym typeface="Open Sans"/>
-                      </a:endParaRPr>
                     </a:p>
                   </a:txBody>
                   <a:tcPr marL="63500" marR="63500" marT="25400" marB="25400" anchor="ctr">
@@ -14677,15 +15282,6 @@
                         </a:rPr>
                         <a:t>ID_Займа, Сумма, Дата, Тип</a:t>
                       </a:r>
-                      <a:endParaRPr lang="en-US" sz="1500" b="0" i="0" u="none" strike="noStrike" cap="none">
-                        <a:solidFill>
-                          <a:srgbClr val="1E293B"/>
-                        </a:solidFill>
-                        <a:latin typeface="Times New Roman" panose="02020603050405020304" charset="0"/>
-                        <a:ea typeface="Open Sans"/>
-                        <a:cs typeface="Times New Roman" panose="02020603050405020304" charset="0"/>
-                        <a:sym typeface="Open Sans"/>
-                      </a:endParaRPr>
                     </a:p>
                   </a:txBody>
                   <a:tcPr marL="63500" marR="63500" marT="25400" marB="25400" anchor="ctr">
@@ -14724,6 +15320,11 @@
                     </a:solidFill>
                   </a:tcPr>
                 </a:tc>
+                <a:extLst>
+                  <a:ext uri="{0D108BD9-81ED-4DB2-BD59-A6C34878D82A}">
+                    <a16:rowId xmlns:a16="http://schemas.microsoft.com/office/drawing/2014/main" val="10004"/>
+                  </a:ext>
+                </a:extLst>
               </a:tr>
             </a:tbl>
           </a:graphicData>
@@ -14894,7 +15495,7 @@
     </p:bg>
     <p:spTree>
       <p:nvGrpSpPr>
-        <p:cNvPr id="169" name="Shape 169"/>
+        <p:cNvPr id="1" name="Shape 169"/>
         <p:cNvGrpSpPr/>
         <p:nvPr/>
       </p:nvGrpSpPr>
@@ -14952,15 +15553,6 @@
               </a:rPr>
               <a:t>Спасибо за внимание!</a:t>
             </a:r>
-            <a:endParaRPr lang="en-US" sz="6000" b="1" i="0" u="none" strike="noStrike" cap="none">
-              <a:solidFill>
-                <a:srgbClr val="005088"/>
-              </a:solidFill>
-              <a:latin typeface="Times New Roman" panose="02020603050405020304" charset="0"/>
-              <a:ea typeface="Montserrat"/>
-              <a:cs typeface="Times New Roman" panose="02020603050405020304" charset="0"/>
-              <a:sym typeface="Montserrat"/>
-            </a:endParaRPr>
           </a:p>
         </p:txBody>
       </p:sp>
@@ -15248,6 +15840,8 @@
       </a:bgFillStyleLst>
     </a:fmtScheme>
   </a:themeElements>
+  <a:objectDefaults/>
+  <a:extraClrSchemeLst/>
   <a:extLst>
     <a:ext uri="{05A4C25C-085E-4340-85A3-A5531E510DB2}">
       <thm15:themeFamily xmlns:thm15="http://schemas.microsoft.com/office/thememl/2012/main" name="Office Theme" id="{62F939B6-93AF-4DB8-9C6B-D6C7DFDC589F}" vid="{4A3C46E8-61CC-4603-A589-7422A47A8E4A}"/>
@@ -15532,6 +16126,8 @@
       </a:bgFillStyleLst>
     </a:fmtScheme>
   </a:themeElements>
+  <a:objectDefaults/>
+  <a:extraClrSchemeLst/>
   <a:extLst>
     <a:ext uri="{05A4C25C-085E-4340-85A3-A5531E510DB2}">
       <thm15:themeFamily xmlns:thm15="http://schemas.microsoft.com/office/thememl/2012/main" name="Office Theme" id="{62F939B6-93AF-4DB8-9C6B-D6C7DFDC589F}" vid="{4A3C46E8-61CC-4603-A589-7422A47A8E4A}"/>
